--- a/assets/figures-editable/c3-c4/c3-e18.pptx
+++ b/assets/figures-editable/c3-c4/c3-e18.pptx
@@ -3104,8 +3104,8 @@
         </p:nvSpPr>
         <p:spPr>
           <a:xfrm>
-            <a:off x="274320" y="137160"/>
-            <a:ext cx="11612880" cy="365760"/>
+            <a:off x="274320" y="118872"/>
+            <a:ext cx="11612880" cy="340105"/>
           </a:xfrm>
           <a:prstGeom prst="rect">
             <a:avLst/>
@@ -3114,7 +3114,7 @@
           <a:effectLst/>
         </p:spPr>
         <p:txBody>
-          <a:bodyPr wrap="square" lIns="27432" rIns="27432" tIns="18288" bIns="18288" anchor="ctr">
+          <a:bodyPr wrap="none" lIns="18288" rIns="18288" tIns="18288" bIns="18288" anchor="t">
             <a:spAutoFit/>
           </a:bodyPr>
           <a:lstStyle/>
@@ -3125,7 +3125,7 @@
               </a:spcAft>
             </a:pPr>
             <a:r>
-              <a:rPr sz="2100" b="0" i="0">
+              <a:rPr sz="1900" b="1" i="0">
                 <a:solidFill>
                   <a:srgbClr val="8EDBD4"/>
                 </a:solidFill>
@@ -3136,23 +3136,20 @@
           </a:p>
         </p:txBody>
       </p:sp>
-      <p:sp>
-        <p:nvSpPr>
-          <p:cNvPr id="3" name="C3-E18 rect 1" descr="sci-ppt:o001"/>
-          <p:cNvSpPr/>
+      <p:cxnSp>
+        <p:nvCxnSpPr>
+          <p:cNvPr id="3" name="C3-E18 line 1" descr="sci-ppt:o001"/>
+          <p:cNvCxnSpPr/>
           <p:nvPr/>
-        </p:nvSpPr>
-        <p:spPr>
-          <a:xfrm>
-            <a:off x="731520" y="1508760"/>
-            <a:ext cx="4937760" cy="731520"/>
-          </a:xfrm>
-          <a:prstGeom prst="rect">
+        </p:nvCxnSpPr>
+        <p:spPr>
+          <a:xfrm>
+            <a:off x="914400" y="5029200"/>
+            <a:ext cx="5852160" cy="0"/>
+          </a:xfrm>
+          <a:prstGeom prst="line">
             <a:avLst/>
           </a:prstGeom>
-          <a:solidFill>
-            <a:srgbClr val="213E4B"/>
-          </a:solidFill>
           <a:ln w="19050">
             <a:solidFill>
               <a:srgbClr val="B4C7D2"/>
@@ -3160,78 +3157,51 @@
           </a:ln>
           <a:effectLst/>
         </p:spPr>
-        <p:txBody>
-          <a:bodyPr rtlCol="0" anchor="ctr"/>
-          <a:lstStyle/>
-          <a:p>
-            <a:pPr algn="ctr"/>
-          </a:p>
-        </p:txBody>
-      </p:sp>
+      </p:cxnSp>
       <p:cxnSp>
         <p:nvCxnSpPr>
-          <p:cNvPr id="4" name="C3-E18 arrow 2" descr="sci-ppt:o002"/>
+          <p:cNvPr id="4" name="C3-E18 line 2" descr="sci-ppt:o002"/>
           <p:cNvCxnSpPr/>
           <p:nvPr/>
         </p:nvCxnSpPr>
         <p:spPr>
           <a:xfrm>
-            <a:off x="1005840" y="1874519"/>
-            <a:ext cx="4297680" cy="0"/>
+            <a:off x="914400" y="1371600"/>
+            <a:ext cx="0" cy="3657600"/>
           </a:xfrm>
           <a:prstGeom prst="line">
             <a:avLst/>
           </a:prstGeom>
-          <a:ln w="25400">
+          <a:ln w="19050">
             <a:solidFill>
-              <a:srgbClr val="8EDBD4"/>
+              <a:srgbClr val="B4C7D2"/>
             </a:solidFill>
-            <a:headEnd type="none" w="med" len="med"/>
-            <a:tailEnd type="triangle" w="med" len="med"/>
           </a:ln>
           <a:effectLst/>
         </p:spPr>
       </p:cxnSp>
-      <p:sp>
-        <p:nvSpPr>
-          <p:cNvPr id="5" name="C3-E18 text 3" descr="sci-ppt:o003"/>
-          <p:cNvSpPr txBox="1"/>
+      <p:cxnSp>
+        <p:nvCxnSpPr>
+          <p:cNvPr id="5" name="C3-E18 line 3" descr="sci-ppt:o003"/>
+          <p:cNvCxnSpPr/>
           <p:nvPr/>
-        </p:nvSpPr>
-        <p:spPr>
-          <a:xfrm>
-            <a:off x="1463040" y="1051560"/>
-            <a:ext cx="3931920" cy="365760"/>
-          </a:xfrm>
-          <a:prstGeom prst="rect">
+        </p:nvCxnSpPr>
+        <p:spPr>
+          <a:xfrm>
+            <a:off x="914400" y="5029200"/>
+            <a:ext cx="0" cy="64008"/>
+          </a:xfrm>
+          <a:prstGeom prst="line">
             <a:avLst/>
           </a:prstGeom>
-          <a:noFill/>
+          <a:ln w="12700">
+            <a:solidFill>
+              <a:srgbClr val="B4C7D2"/>
+            </a:solidFill>
+          </a:ln>
           <a:effectLst/>
         </p:spPr>
-        <p:txBody>
-          <a:bodyPr wrap="square" lIns="27432" rIns="27432" tIns="18288" bIns="18288" anchor="ctr">
-            <a:spAutoFit/>
-          </a:bodyPr>
-          <a:lstStyle/>
-          <a:p>
-            <a:pPr algn="l">
-              <a:spcAft>
-                <a:spcPts val="0"/>
-              </a:spcAft>
-            </a:pPr>
-            <a:r>
-              <a:rPr sz="1800" b="0" i="0">
-                <a:solidFill>
-                  <a:srgbClr val="E7F0F3"/>
-                </a:solidFill>
-                <a:latin typeface="Arial"/>
-              </a:rPr>
-              <a:t>Finite emitted liquid: m_j, E_j, U_j</a:t>
-            </a:r>
-          </a:p>
-        </p:txBody>
-      </p:sp>
+      </p:cxnSp>
       <p:cxnSp>
         <p:nvCxnSpPr>
           <p:cNvPr id="6" name="C3-E18 line 4" descr="sci-ppt:o004"/>
@@ -3240,15 +3210,15 @@
         </p:nvCxnSpPr>
         <p:spPr>
           <a:xfrm>
-            <a:off x="731520" y="2606040"/>
-            <a:ext cx="4937760" cy="0"/>
+            <a:off x="914400" y="1371600"/>
+            <a:ext cx="0" cy="3657600"/>
           </a:xfrm>
           <a:prstGeom prst="line">
             <a:avLst/>
           </a:prstGeom>
-          <a:ln w="25400">
+          <a:ln w="7620">
             <a:solidFill>
-              <a:srgbClr val="8EDBD4"/>
+              <a:srgbClr val="2E4756"/>
             </a:solidFill>
           </a:ln>
           <a:effectLst/>
@@ -3262,8 +3232,8 @@
         </p:nvSpPr>
         <p:spPr>
           <a:xfrm>
-            <a:off x="2743200" y="2697480"/>
-            <a:ext cx="1828800" cy="365760"/>
+            <a:off x="457200" y="5111496"/>
+            <a:ext cx="914400" cy="208407"/>
           </a:xfrm>
           <a:prstGeom prst="rect">
             <a:avLst/>
@@ -3272,24 +3242,24 @@
           <a:effectLst/>
         </p:spPr>
         <p:txBody>
-          <a:bodyPr wrap="square" lIns="27432" rIns="27432" tIns="18288" bIns="18288" anchor="ctr">
+          <a:bodyPr wrap="none" lIns="18288" rIns="18288" tIns="18288" bIns="18288" anchor="t">
             <a:spAutoFit/>
           </a:bodyPr>
           <a:lstStyle/>
           <a:p>
-            <a:pPr algn="l">
+            <a:pPr algn="ctr">
               <a:spcAft>
                 <a:spcPts val="0"/>
               </a:spcAft>
             </a:pPr>
             <a:r>
-              <a:rPr sz="1700" b="0" i="0">
+              <a:rPr sz="1050" b="0" i="0">
                 <a:solidFill>
-                  <a:srgbClr val="E7F0F3"/>
+                  <a:srgbClr val="B4C7D2"/>
                 </a:solidFill>
                 <a:latin typeface="Arial"/>
               </a:rPr>
-              <a:t>L_j</a:t>
+              <a:t>0e+00</a:t>
             </a:r>
           </a:p>
         </p:txBody>
@@ -3302,30 +3272,2604 @@
         </p:nvCxnSpPr>
         <p:spPr>
           <a:xfrm>
-            <a:off x="457200" y="1508760"/>
-            <a:ext cx="0" cy="731520"/>
+            <a:off x="2244436" y="5029200"/>
+            <a:ext cx="0" cy="64008"/>
           </a:xfrm>
           <a:prstGeom prst="line">
             <a:avLst/>
           </a:prstGeom>
-          <a:ln w="25400">
+          <a:ln w="12700">
+            <a:solidFill>
+              <a:srgbClr val="B4C7D2"/>
+            </a:solidFill>
+          </a:ln>
+          <a:effectLst/>
+        </p:spPr>
+      </p:cxnSp>
+      <p:cxnSp>
+        <p:nvCxnSpPr>
+          <p:cNvPr id="9" name="C3-E18 line 7" descr="sci-ppt:o007"/>
+          <p:cNvCxnSpPr/>
+          <p:nvPr/>
+        </p:nvCxnSpPr>
+        <p:spPr>
+          <a:xfrm>
+            <a:off x="2244436" y="1371600"/>
+            <a:ext cx="0" cy="3657600"/>
+          </a:xfrm>
+          <a:prstGeom prst="line">
+            <a:avLst/>
+          </a:prstGeom>
+          <a:ln w="7620">
+            <a:solidFill>
+              <a:srgbClr val="2E4756"/>
+            </a:solidFill>
+          </a:ln>
+          <a:effectLst/>
+        </p:spPr>
+      </p:cxnSp>
+      <p:sp>
+        <p:nvSpPr>
+          <p:cNvPr id="10" name="C3-E18 text 8" descr="sci-ppt:o008"/>
+          <p:cNvSpPr txBox="1"/>
+          <p:nvPr/>
+        </p:nvSpPr>
+        <p:spPr>
+          <a:xfrm>
+            <a:off x="1787236" y="5111496"/>
+            <a:ext cx="914400" cy="208407"/>
+          </a:xfrm>
+          <a:prstGeom prst="rect">
+            <a:avLst/>
+          </a:prstGeom>
+          <a:noFill/>
+          <a:effectLst/>
+        </p:spPr>
+        <p:txBody>
+          <a:bodyPr wrap="none" lIns="18288" rIns="18288" tIns="18288" bIns="18288" anchor="t">
+            <a:spAutoFit/>
+          </a:bodyPr>
+          <a:lstStyle/>
+          <a:p>
+            <a:pPr algn="ctr">
+              <a:spcAft>
+                <a:spcPts val="0"/>
+              </a:spcAft>
+            </a:pPr>
+            <a:r>
+              <a:rPr sz="1050" b="0" i="0">
+                <a:solidFill>
+                  <a:srgbClr val="B4C7D2"/>
+                </a:solidFill>
+                <a:latin typeface="Arial"/>
+              </a:rPr>
+              <a:t>5e-11</a:t>
+            </a:r>
+          </a:p>
+        </p:txBody>
+      </p:sp>
+      <p:cxnSp>
+        <p:nvCxnSpPr>
+          <p:cNvPr id="11" name="C3-E18 line 9" descr="sci-ppt:o009"/>
+          <p:cNvCxnSpPr/>
+          <p:nvPr/>
+        </p:nvCxnSpPr>
+        <p:spPr>
+          <a:xfrm>
+            <a:off x="3574472" y="5029200"/>
+            <a:ext cx="0" cy="64008"/>
+          </a:xfrm>
+          <a:prstGeom prst="line">
+            <a:avLst/>
+          </a:prstGeom>
+          <a:ln w="12700">
+            <a:solidFill>
+              <a:srgbClr val="B4C7D2"/>
+            </a:solidFill>
+          </a:ln>
+          <a:effectLst/>
+        </p:spPr>
+      </p:cxnSp>
+      <p:cxnSp>
+        <p:nvCxnSpPr>
+          <p:cNvPr id="12" name="C3-E18 line 10" descr="sci-ppt:o010"/>
+          <p:cNvCxnSpPr/>
+          <p:nvPr/>
+        </p:nvCxnSpPr>
+        <p:spPr>
+          <a:xfrm>
+            <a:off x="3574472" y="1371600"/>
+            <a:ext cx="0" cy="3657600"/>
+          </a:xfrm>
+          <a:prstGeom prst="line">
+            <a:avLst/>
+          </a:prstGeom>
+          <a:ln w="7620">
+            <a:solidFill>
+              <a:srgbClr val="2E4756"/>
+            </a:solidFill>
+          </a:ln>
+          <a:effectLst/>
+        </p:spPr>
+      </p:cxnSp>
+      <p:sp>
+        <p:nvSpPr>
+          <p:cNvPr id="13" name="C3-E18 text 11" descr="sci-ppt:o011"/>
+          <p:cNvSpPr txBox="1"/>
+          <p:nvPr/>
+        </p:nvSpPr>
+        <p:spPr>
+          <a:xfrm>
+            <a:off x="3117272" y="5111496"/>
+            <a:ext cx="914400" cy="208407"/>
+          </a:xfrm>
+          <a:prstGeom prst="rect">
+            <a:avLst/>
+          </a:prstGeom>
+          <a:noFill/>
+          <a:effectLst/>
+        </p:spPr>
+        <p:txBody>
+          <a:bodyPr wrap="none" lIns="18288" rIns="18288" tIns="18288" bIns="18288" anchor="t">
+            <a:spAutoFit/>
+          </a:bodyPr>
+          <a:lstStyle/>
+          <a:p>
+            <a:pPr algn="ctr">
+              <a:spcAft>
+                <a:spcPts val="0"/>
+              </a:spcAft>
+            </a:pPr>
+            <a:r>
+              <a:rPr sz="1050" b="0" i="0">
+                <a:solidFill>
+                  <a:srgbClr val="B4C7D2"/>
+                </a:solidFill>
+                <a:latin typeface="Arial"/>
+              </a:rPr>
+              <a:t>1e-10</a:t>
+            </a:r>
+          </a:p>
+        </p:txBody>
+      </p:sp>
+      <p:cxnSp>
+        <p:nvCxnSpPr>
+          <p:cNvPr id="14" name="C3-E18 line 12" descr="sci-ppt:o012"/>
+          <p:cNvCxnSpPr/>
+          <p:nvPr/>
+        </p:nvCxnSpPr>
+        <p:spPr>
+          <a:xfrm>
+            <a:off x="4904509" y="5029200"/>
+            <a:ext cx="0" cy="64008"/>
+          </a:xfrm>
+          <a:prstGeom prst="line">
+            <a:avLst/>
+          </a:prstGeom>
+          <a:ln w="12700">
+            <a:solidFill>
+              <a:srgbClr val="B4C7D2"/>
+            </a:solidFill>
+          </a:ln>
+          <a:effectLst/>
+        </p:spPr>
+      </p:cxnSp>
+      <p:cxnSp>
+        <p:nvCxnSpPr>
+          <p:cNvPr id="15" name="C3-E18 line 13" descr="sci-ppt:o013"/>
+          <p:cNvCxnSpPr/>
+          <p:nvPr/>
+        </p:nvCxnSpPr>
+        <p:spPr>
+          <a:xfrm>
+            <a:off x="4904509" y="1371600"/>
+            <a:ext cx="0" cy="3657600"/>
+          </a:xfrm>
+          <a:prstGeom prst="line">
+            <a:avLst/>
+          </a:prstGeom>
+          <a:ln w="7620">
+            <a:solidFill>
+              <a:srgbClr val="2E4756"/>
+            </a:solidFill>
+          </a:ln>
+          <a:effectLst/>
+        </p:spPr>
+      </p:cxnSp>
+      <p:sp>
+        <p:nvSpPr>
+          <p:cNvPr id="16" name="C3-E18 text 14" descr="sci-ppt:o014"/>
+          <p:cNvSpPr txBox="1"/>
+          <p:nvPr/>
+        </p:nvSpPr>
+        <p:spPr>
+          <a:xfrm>
+            <a:off x="4447309" y="5111496"/>
+            <a:ext cx="914400" cy="208407"/>
+          </a:xfrm>
+          <a:prstGeom prst="rect">
+            <a:avLst/>
+          </a:prstGeom>
+          <a:noFill/>
+          <a:effectLst/>
+        </p:spPr>
+        <p:txBody>
+          <a:bodyPr wrap="none" lIns="18288" rIns="18288" tIns="18288" bIns="18288" anchor="t">
+            <a:spAutoFit/>
+          </a:bodyPr>
+          <a:lstStyle/>
+          <a:p>
+            <a:pPr algn="ctr">
+              <a:spcAft>
+                <a:spcPts val="0"/>
+              </a:spcAft>
+            </a:pPr>
+            <a:r>
+              <a:rPr sz="1050" b="0" i="0">
+                <a:solidFill>
+                  <a:srgbClr val="B4C7D2"/>
+                </a:solidFill>
+                <a:latin typeface="Arial"/>
+              </a:rPr>
+              <a:t>1e-10</a:t>
+            </a:r>
+          </a:p>
+        </p:txBody>
+      </p:sp>
+      <p:cxnSp>
+        <p:nvCxnSpPr>
+          <p:cNvPr id="17" name="C3-E18 line 15" descr="sci-ppt:o015"/>
+          <p:cNvCxnSpPr/>
+          <p:nvPr/>
+        </p:nvCxnSpPr>
+        <p:spPr>
+          <a:xfrm>
+            <a:off x="6234545" y="5029200"/>
+            <a:ext cx="0" cy="64008"/>
+          </a:xfrm>
+          <a:prstGeom prst="line">
+            <a:avLst/>
+          </a:prstGeom>
+          <a:ln w="12700">
+            <a:solidFill>
+              <a:srgbClr val="B4C7D2"/>
+            </a:solidFill>
+          </a:ln>
+          <a:effectLst/>
+        </p:spPr>
+      </p:cxnSp>
+      <p:cxnSp>
+        <p:nvCxnSpPr>
+          <p:cNvPr id="18" name="C3-E18 line 16" descr="sci-ppt:o016"/>
+          <p:cNvCxnSpPr/>
+          <p:nvPr/>
+        </p:nvCxnSpPr>
+        <p:spPr>
+          <a:xfrm>
+            <a:off x="6234545" y="1371600"/>
+            <a:ext cx="0" cy="3657600"/>
+          </a:xfrm>
+          <a:prstGeom prst="line">
+            <a:avLst/>
+          </a:prstGeom>
+          <a:ln w="7620">
+            <a:solidFill>
+              <a:srgbClr val="2E4756"/>
+            </a:solidFill>
+          </a:ln>
+          <a:effectLst/>
+        </p:spPr>
+      </p:cxnSp>
+      <p:sp>
+        <p:nvSpPr>
+          <p:cNvPr id="19" name="C3-E18 text 17" descr="sci-ppt:o017"/>
+          <p:cNvSpPr txBox="1"/>
+          <p:nvPr/>
+        </p:nvSpPr>
+        <p:spPr>
+          <a:xfrm>
+            <a:off x="5777345" y="5111496"/>
+            <a:ext cx="914400" cy="208407"/>
+          </a:xfrm>
+          <a:prstGeom prst="rect">
+            <a:avLst/>
+          </a:prstGeom>
+          <a:noFill/>
+          <a:effectLst/>
+        </p:spPr>
+        <p:txBody>
+          <a:bodyPr wrap="none" lIns="18288" rIns="18288" tIns="18288" bIns="18288" anchor="t">
+            <a:spAutoFit/>
+          </a:bodyPr>
+          <a:lstStyle/>
+          <a:p>
+            <a:pPr algn="ctr">
+              <a:spcAft>
+                <a:spcPts val="0"/>
+              </a:spcAft>
+            </a:pPr>
+            <a:r>
+              <a:rPr sz="1050" b="0" i="0">
+                <a:solidFill>
+                  <a:srgbClr val="B4C7D2"/>
+                </a:solidFill>
+                <a:latin typeface="Arial"/>
+              </a:rPr>
+              <a:t>2e-10</a:t>
+            </a:r>
+          </a:p>
+        </p:txBody>
+      </p:sp>
+      <p:cxnSp>
+        <p:nvCxnSpPr>
+          <p:cNvPr id="20" name="C3-E18 line 18" descr="sci-ppt:o018"/>
+          <p:cNvCxnSpPr/>
+          <p:nvPr/>
+        </p:nvCxnSpPr>
+        <p:spPr>
+          <a:xfrm>
+            <a:off x="850392" y="5029200"/>
+            <a:ext cx="64008" cy="0"/>
+          </a:xfrm>
+          <a:prstGeom prst="line">
+            <a:avLst/>
+          </a:prstGeom>
+          <a:ln w="12700">
+            <a:solidFill>
+              <a:srgbClr val="B4C7D2"/>
+            </a:solidFill>
+          </a:ln>
+          <a:effectLst/>
+        </p:spPr>
+      </p:cxnSp>
+      <p:cxnSp>
+        <p:nvCxnSpPr>
+          <p:cNvPr id="21" name="C3-E18 line 19" descr="sci-ppt:o019"/>
+          <p:cNvCxnSpPr/>
+          <p:nvPr/>
+        </p:nvCxnSpPr>
+        <p:spPr>
+          <a:xfrm>
+            <a:off x="850392" y="3810000"/>
+            <a:ext cx="64008" cy="0"/>
+          </a:xfrm>
+          <a:prstGeom prst="line">
+            <a:avLst/>
+          </a:prstGeom>
+          <a:ln w="12700">
+            <a:solidFill>
+              <a:srgbClr val="B4C7D2"/>
+            </a:solidFill>
+          </a:ln>
+          <a:effectLst/>
+        </p:spPr>
+      </p:cxnSp>
+      <p:cxnSp>
+        <p:nvCxnSpPr>
+          <p:cNvPr id="22" name="C3-E18 line 20" descr="sci-ppt:o020"/>
+          <p:cNvCxnSpPr/>
+          <p:nvPr/>
+        </p:nvCxnSpPr>
+        <p:spPr>
+          <a:xfrm>
+            <a:off x="914400" y="3810000"/>
+            <a:ext cx="5852160" cy="0"/>
+          </a:xfrm>
+          <a:prstGeom prst="line">
+            <a:avLst/>
+          </a:prstGeom>
+          <a:ln w="7620">
+            <a:solidFill>
+              <a:srgbClr val="2E4756"/>
+            </a:solidFill>
+          </a:ln>
+          <a:effectLst/>
+        </p:spPr>
+      </p:cxnSp>
+      <p:sp>
+        <p:nvSpPr>
+          <p:cNvPr id="23" name="C3-E18 text 21" descr="sci-ppt:o021"/>
+          <p:cNvSpPr txBox="1"/>
+          <p:nvPr/>
+        </p:nvSpPr>
+        <p:spPr>
+          <a:xfrm>
+            <a:off x="45720" y="3727704"/>
+            <a:ext cx="777240" cy="208407"/>
+          </a:xfrm>
+          <a:prstGeom prst="rect">
+            <a:avLst/>
+          </a:prstGeom>
+          <a:noFill/>
+          <a:effectLst/>
+        </p:spPr>
+        <p:txBody>
+          <a:bodyPr wrap="none" lIns="18288" rIns="18288" tIns="18288" bIns="18288" anchor="t">
+            <a:spAutoFit/>
+          </a:bodyPr>
+          <a:lstStyle/>
+          <a:p>
+            <a:pPr algn="r">
+              <a:spcAft>
+                <a:spcPts val="0"/>
+              </a:spcAft>
+            </a:pPr>
+            <a:r>
+              <a:rPr sz="1050" b="0" i="0">
+                <a:solidFill>
+                  <a:srgbClr val="B4C7D2"/>
+                </a:solidFill>
+                <a:latin typeface="Arial"/>
+              </a:rPr>
+              <a:t>2</a:t>
+            </a:r>
+          </a:p>
+        </p:txBody>
+      </p:sp>
+      <p:cxnSp>
+        <p:nvCxnSpPr>
+          <p:cNvPr id="24" name="C3-E18 line 22" descr="sci-ppt:o022"/>
+          <p:cNvCxnSpPr/>
+          <p:nvPr/>
+        </p:nvCxnSpPr>
+        <p:spPr>
+          <a:xfrm>
+            <a:off x="850392" y="2590800"/>
+            <a:ext cx="64008" cy="0"/>
+          </a:xfrm>
+          <a:prstGeom prst="line">
+            <a:avLst/>
+          </a:prstGeom>
+          <a:ln w="12700">
+            <a:solidFill>
+              <a:srgbClr val="B4C7D2"/>
+            </a:solidFill>
+          </a:ln>
+          <a:effectLst/>
+        </p:spPr>
+      </p:cxnSp>
+      <p:cxnSp>
+        <p:nvCxnSpPr>
+          <p:cNvPr id="25" name="C3-E18 line 23" descr="sci-ppt:o023"/>
+          <p:cNvCxnSpPr/>
+          <p:nvPr/>
+        </p:nvCxnSpPr>
+        <p:spPr>
+          <a:xfrm>
+            <a:off x="914400" y="2590800"/>
+            <a:ext cx="5852160" cy="0"/>
+          </a:xfrm>
+          <a:prstGeom prst="line">
+            <a:avLst/>
+          </a:prstGeom>
+          <a:ln w="7620">
+            <a:solidFill>
+              <a:srgbClr val="2E4756"/>
+            </a:solidFill>
+          </a:ln>
+          <a:effectLst/>
+        </p:spPr>
+      </p:cxnSp>
+      <p:sp>
+        <p:nvSpPr>
+          <p:cNvPr id="26" name="C3-E18 text 24" descr="sci-ppt:o024"/>
+          <p:cNvSpPr txBox="1"/>
+          <p:nvPr/>
+        </p:nvSpPr>
+        <p:spPr>
+          <a:xfrm>
+            <a:off x="45720" y="2508504"/>
+            <a:ext cx="777240" cy="208407"/>
+          </a:xfrm>
+          <a:prstGeom prst="rect">
+            <a:avLst/>
+          </a:prstGeom>
+          <a:noFill/>
+          <a:effectLst/>
+        </p:spPr>
+        <p:txBody>
+          <a:bodyPr wrap="none" lIns="18288" rIns="18288" tIns="18288" bIns="18288" anchor="t">
+            <a:spAutoFit/>
+          </a:bodyPr>
+          <a:lstStyle/>
+          <a:p>
+            <a:pPr algn="r">
+              <a:spcAft>
+                <a:spcPts val="0"/>
+              </a:spcAft>
+            </a:pPr>
+            <a:r>
+              <a:rPr sz="1050" b="0" i="0">
+                <a:solidFill>
+                  <a:srgbClr val="B4C7D2"/>
+                </a:solidFill>
+                <a:latin typeface="Arial"/>
+              </a:rPr>
+              <a:t>4</a:t>
+            </a:r>
+          </a:p>
+        </p:txBody>
+      </p:sp>
+      <p:cxnSp>
+        <p:nvCxnSpPr>
+          <p:cNvPr id="27" name="C3-E18 line 25" descr="sci-ppt:o025"/>
+          <p:cNvCxnSpPr/>
+          <p:nvPr/>
+        </p:nvCxnSpPr>
+        <p:spPr>
+          <a:xfrm>
+            <a:off x="850392" y="1371600"/>
+            <a:ext cx="64008" cy="0"/>
+          </a:xfrm>
+          <a:prstGeom prst="line">
+            <a:avLst/>
+          </a:prstGeom>
+          <a:ln w="12700">
+            <a:solidFill>
+              <a:srgbClr val="B4C7D2"/>
+            </a:solidFill>
+          </a:ln>
+          <a:effectLst/>
+        </p:spPr>
+      </p:cxnSp>
+      <p:cxnSp>
+        <p:nvCxnSpPr>
+          <p:cNvPr id="28" name="C3-E18 line 26" descr="sci-ppt:o026"/>
+          <p:cNvCxnSpPr/>
+          <p:nvPr/>
+        </p:nvCxnSpPr>
+        <p:spPr>
+          <a:xfrm>
+            <a:off x="914400" y="1371600"/>
+            <a:ext cx="5852160" cy="0"/>
+          </a:xfrm>
+          <a:prstGeom prst="line">
+            <a:avLst/>
+          </a:prstGeom>
+          <a:ln w="7620">
+            <a:solidFill>
+              <a:srgbClr val="2E4756"/>
+            </a:solidFill>
+          </a:ln>
+          <a:effectLst/>
+        </p:spPr>
+      </p:cxnSp>
+      <p:sp>
+        <p:nvSpPr>
+          <p:cNvPr id="29" name="C3-E18 text 27" descr="sci-ppt:o027"/>
+          <p:cNvSpPr txBox="1"/>
+          <p:nvPr/>
+        </p:nvSpPr>
+        <p:spPr>
+          <a:xfrm>
+            <a:off x="45720" y="1289304"/>
+            <a:ext cx="777240" cy="208407"/>
+          </a:xfrm>
+          <a:prstGeom prst="rect">
+            <a:avLst/>
+          </a:prstGeom>
+          <a:noFill/>
+          <a:effectLst/>
+        </p:spPr>
+        <p:txBody>
+          <a:bodyPr wrap="none" lIns="18288" rIns="18288" tIns="18288" bIns="18288" anchor="t">
+            <a:spAutoFit/>
+          </a:bodyPr>
+          <a:lstStyle/>
+          <a:p>
+            <a:pPr algn="r">
+              <a:spcAft>
+                <a:spcPts val="0"/>
+              </a:spcAft>
+            </a:pPr>
+            <a:r>
+              <a:rPr sz="1050" b="0" i="0">
+                <a:solidFill>
+                  <a:srgbClr val="B4C7D2"/>
+                </a:solidFill>
+                <a:latin typeface="Arial"/>
+              </a:rPr>
+              <a:t>6</a:t>
+            </a:r>
+          </a:p>
+        </p:txBody>
+      </p:sp>
+      <p:sp>
+        <p:nvSpPr>
+          <p:cNvPr id="30" name="C3-E18 text 28" descr="sci-ppt:o028"/>
+          <p:cNvSpPr txBox="1"/>
+          <p:nvPr/>
+        </p:nvSpPr>
+        <p:spPr>
+          <a:xfrm>
+            <a:off x="914400" y="5312664"/>
+            <a:ext cx="5852160" cy="231648"/>
+          </a:xfrm>
+          <a:prstGeom prst="rect">
+            <a:avLst/>
+          </a:prstGeom>
+          <a:noFill/>
+          <a:effectLst/>
+        </p:spPr>
+        <p:txBody>
+          <a:bodyPr wrap="none" lIns="18288" rIns="18288" tIns="18288" bIns="18288" anchor="t">
+            <a:spAutoFit/>
+          </a:bodyPr>
+          <a:lstStyle/>
+          <a:p>
+            <a:pPr algn="ctr">
+              <a:spcAft>
+                <a:spcPts val="0"/>
+              </a:spcAft>
+            </a:pPr>
+            <a:r>
+              <a:rPr sz="1200" b="0" i="0">
+                <a:solidFill>
+                  <a:srgbClr val="E7F0F3"/>
+                </a:solidFill>
+                <a:latin typeface="Arial"/>
+              </a:rPr>
+              <a:t>directed momentum Pⱼ  (N s)</a:t>
+            </a:r>
+          </a:p>
+        </p:txBody>
+      </p:sp>
+      <p:sp>
+        <p:nvSpPr>
+          <p:cNvPr id="31" name="C3-E18 text 29" descr="sci-ppt:o029"/>
+          <p:cNvSpPr txBox="1"/>
+          <p:nvPr/>
+        </p:nvSpPr>
+        <p:spPr>
+          <a:xfrm>
+            <a:off x="365760" y="1024128"/>
+            <a:ext cx="5852160" cy="231648"/>
+          </a:xfrm>
+          <a:prstGeom prst="rect">
+            <a:avLst/>
+          </a:prstGeom>
+          <a:noFill/>
+          <a:effectLst/>
+        </p:spPr>
+        <p:txBody>
+          <a:bodyPr wrap="none" lIns="18288" rIns="18288" tIns="18288" bIns="18288" anchor="t">
+            <a:spAutoFit/>
+          </a:bodyPr>
+          <a:lstStyle/>
+          <a:p>
+            <a:pPr algn="l">
+              <a:spcAft>
+                <a:spcPts val="0"/>
+              </a:spcAft>
+            </a:pPr>
+            <a:r>
+              <a:rPr sz="1200" b="0" i="0">
+                <a:solidFill>
+                  <a:srgbClr val="E7F0F3"/>
+                </a:solidFill>
+                <a:latin typeface="Arial"/>
+              </a:rPr>
+              <a:t>kinetic energy Eⱼ  (nJ)</a:t>
+            </a:r>
+          </a:p>
+        </p:txBody>
+      </p:sp>
+      <p:sp>
+        <p:nvSpPr>
+          <p:cNvPr id="32" name="C3-E18 polygon 30" descr="sci-ppt:o030"/>
+          <p:cNvSpPr/>
+          <p:nvPr/>
+        </p:nvSpPr>
+        <p:spPr>
+          <a:xfrm>
+            <a:off x="914400" y="1371600"/>
+            <a:ext cx="5852160" cy="3657600"/>
+          </a:xfrm>
+          <a:custGeom>
+            <a:avLst/>
+            <a:gdLst/>
+            <a:ahLst/>
+            <a:cxnLst/>
+            <a:rect l="l" t="t" r="r" b="b"/>
+            <a:pathLst>
+              <a:path w="5852160" h="3657600">
+                <a:moveTo>
+                  <a:pt x="0" y="0"/>
+                </a:moveTo>
+                <a:lnTo>
+                  <a:pt x="29407" y="0"/>
+                </a:lnTo>
+                <a:lnTo>
+                  <a:pt x="58815" y="0"/>
+                </a:lnTo>
+                <a:lnTo>
+                  <a:pt x="88223" y="0"/>
+                </a:lnTo>
+                <a:lnTo>
+                  <a:pt x="117631" y="0"/>
+                </a:lnTo>
+                <a:lnTo>
+                  <a:pt x="147039" y="0"/>
+                </a:lnTo>
+                <a:lnTo>
+                  <a:pt x="176447" y="0"/>
+                </a:lnTo>
+                <a:lnTo>
+                  <a:pt x="205854" y="0"/>
+                </a:lnTo>
+                <a:lnTo>
+                  <a:pt x="235262" y="0"/>
+                </a:lnTo>
+                <a:lnTo>
+                  <a:pt x="264670" y="0"/>
+                </a:lnTo>
+                <a:lnTo>
+                  <a:pt x="294078" y="0"/>
+                </a:lnTo>
+                <a:lnTo>
+                  <a:pt x="323486" y="0"/>
+                </a:lnTo>
+                <a:lnTo>
+                  <a:pt x="352894" y="0"/>
+                </a:lnTo>
+                <a:lnTo>
+                  <a:pt x="382301" y="0"/>
+                </a:lnTo>
+                <a:lnTo>
+                  <a:pt x="411709" y="0"/>
+                </a:lnTo>
+                <a:lnTo>
+                  <a:pt x="441117" y="0"/>
+                </a:lnTo>
+                <a:lnTo>
+                  <a:pt x="470525" y="0"/>
+                </a:lnTo>
+                <a:lnTo>
+                  <a:pt x="499933" y="0"/>
+                </a:lnTo>
+                <a:lnTo>
+                  <a:pt x="529341" y="0"/>
+                </a:lnTo>
+                <a:lnTo>
+                  <a:pt x="558748" y="0"/>
+                </a:lnTo>
+                <a:lnTo>
+                  <a:pt x="588156" y="0"/>
+                </a:lnTo>
+                <a:lnTo>
+                  <a:pt x="617564" y="0"/>
+                </a:lnTo>
+                <a:lnTo>
+                  <a:pt x="646972" y="0"/>
+                </a:lnTo>
+                <a:lnTo>
+                  <a:pt x="676380" y="0"/>
+                </a:lnTo>
+                <a:lnTo>
+                  <a:pt x="705788" y="0"/>
+                </a:lnTo>
+                <a:lnTo>
+                  <a:pt x="735195" y="0"/>
+                </a:lnTo>
+                <a:lnTo>
+                  <a:pt x="764603" y="0"/>
+                </a:lnTo>
+                <a:lnTo>
+                  <a:pt x="794011" y="0"/>
+                </a:lnTo>
+                <a:lnTo>
+                  <a:pt x="823419" y="0"/>
+                </a:lnTo>
+                <a:lnTo>
+                  <a:pt x="852827" y="0"/>
+                </a:lnTo>
+                <a:lnTo>
+                  <a:pt x="882235" y="0"/>
+                </a:lnTo>
+                <a:lnTo>
+                  <a:pt x="911643" y="0"/>
+                </a:lnTo>
+                <a:lnTo>
+                  <a:pt x="941050" y="0"/>
+                </a:lnTo>
+                <a:lnTo>
+                  <a:pt x="970458" y="0"/>
+                </a:lnTo>
+                <a:lnTo>
+                  <a:pt x="999866" y="0"/>
+                </a:lnTo>
+                <a:lnTo>
+                  <a:pt x="1029274" y="0"/>
+                </a:lnTo>
+                <a:lnTo>
+                  <a:pt x="1058682" y="0"/>
+                </a:lnTo>
+                <a:lnTo>
+                  <a:pt x="1088090" y="0"/>
+                </a:lnTo>
+                <a:lnTo>
+                  <a:pt x="1117497" y="0"/>
+                </a:lnTo>
+                <a:lnTo>
+                  <a:pt x="1146905" y="0"/>
+                </a:lnTo>
+                <a:lnTo>
+                  <a:pt x="1176313" y="0"/>
+                </a:lnTo>
+                <a:lnTo>
+                  <a:pt x="1205721" y="0"/>
+                </a:lnTo>
+                <a:lnTo>
+                  <a:pt x="1235129" y="0"/>
+                </a:lnTo>
+                <a:lnTo>
+                  <a:pt x="1264537" y="0"/>
+                </a:lnTo>
+                <a:lnTo>
+                  <a:pt x="1293944" y="0"/>
+                </a:lnTo>
+                <a:lnTo>
+                  <a:pt x="1323352" y="0"/>
+                </a:lnTo>
+                <a:lnTo>
+                  <a:pt x="1352760" y="0"/>
+                </a:lnTo>
+                <a:lnTo>
+                  <a:pt x="1382168" y="0"/>
+                </a:lnTo>
+                <a:lnTo>
+                  <a:pt x="1411576" y="0"/>
+                </a:lnTo>
+                <a:lnTo>
+                  <a:pt x="1440984" y="0"/>
+                </a:lnTo>
+                <a:lnTo>
+                  <a:pt x="1470391" y="0"/>
+                </a:lnTo>
+                <a:lnTo>
+                  <a:pt x="1499799" y="0"/>
+                </a:lnTo>
+                <a:lnTo>
+                  <a:pt x="1529207" y="0"/>
+                </a:lnTo>
+                <a:lnTo>
+                  <a:pt x="1558615" y="0"/>
+                </a:lnTo>
+                <a:lnTo>
+                  <a:pt x="1588023" y="0"/>
+                </a:lnTo>
+                <a:lnTo>
+                  <a:pt x="1617431" y="0"/>
+                </a:lnTo>
+                <a:lnTo>
+                  <a:pt x="1646838" y="0"/>
+                </a:lnTo>
+                <a:lnTo>
+                  <a:pt x="1676246" y="0"/>
+                </a:lnTo>
+                <a:lnTo>
+                  <a:pt x="1705654" y="0"/>
+                </a:lnTo>
+                <a:lnTo>
+                  <a:pt x="1735062" y="0"/>
+                </a:lnTo>
+                <a:lnTo>
+                  <a:pt x="1764470" y="0"/>
+                </a:lnTo>
+                <a:lnTo>
+                  <a:pt x="1793878" y="0"/>
+                </a:lnTo>
+                <a:lnTo>
+                  <a:pt x="1823286" y="0"/>
+                </a:lnTo>
+                <a:lnTo>
+                  <a:pt x="1852693" y="0"/>
+                </a:lnTo>
+                <a:lnTo>
+                  <a:pt x="1882101" y="0"/>
+                </a:lnTo>
+                <a:lnTo>
+                  <a:pt x="1911509" y="0"/>
+                </a:lnTo>
+                <a:lnTo>
+                  <a:pt x="1940917" y="0"/>
+                </a:lnTo>
+                <a:lnTo>
+                  <a:pt x="1970325" y="0"/>
+                </a:lnTo>
+                <a:lnTo>
+                  <a:pt x="1999733" y="0"/>
+                </a:lnTo>
+                <a:lnTo>
+                  <a:pt x="2029140" y="0"/>
+                </a:lnTo>
+                <a:lnTo>
+                  <a:pt x="2058548" y="0"/>
+                </a:lnTo>
+                <a:lnTo>
+                  <a:pt x="2087956" y="0"/>
+                </a:lnTo>
+                <a:lnTo>
+                  <a:pt x="2117364" y="0"/>
+                </a:lnTo>
+                <a:lnTo>
+                  <a:pt x="2146772" y="0"/>
+                </a:lnTo>
+                <a:lnTo>
+                  <a:pt x="2176180" y="0"/>
+                </a:lnTo>
+                <a:lnTo>
+                  <a:pt x="2205587" y="0"/>
+                </a:lnTo>
+                <a:lnTo>
+                  <a:pt x="2234995" y="0"/>
+                </a:lnTo>
+                <a:lnTo>
+                  <a:pt x="2264403" y="0"/>
+                </a:lnTo>
+                <a:lnTo>
+                  <a:pt x="2293811" y="0"/>
+                </a:lnTo>
+                <a:lnTo>
+                  <a:pt x="2323219" y="0"/>
+                </a:lnTo>
+                <a:lnTo>
+                  <a:pt x="2352627" y="0"/>
+                </a:lnTo>
+                <a:lnTo>
+                  <a:pt x="2382034" y="0"/>
+                </a:lnTo>
+                <a:lnTo>
+                  <a:pt x="2411442" y="0"/>
+                </a:lnTo>
+                <a:lnTo>
+                  <a:pt x="2440850" y="0"/>
+                </a:lnTo>
+                <a:lnTo>
+                  <a:pt x="2470258" y="0"/>
+                </a:lnTo>
+                <a:lnTo>
+                  <a:pt x="2499666" y="0"/>
+                </a:lnTo>
+                <a:lnTo>
+                  <a:pt x="2529074" y="0"/>
+                </a:lnTo>
+                <a:lnTo>
+                  <a:pt x="2558482" y="0"/>
+                </a:lnTo>
+                <a:lnTo>
+                  <a:pt x="2587889" y="0"/>
+                </a:lnTo>
+                <a:lnTo>
+                  <a:pt x="2617297" y="0"/>
+                </a:lnTo>
+                <a:lnTo>
+                  <a:pt x="2646705" y="0"/>
+                </a:lnTo>
+                <a:lnTo>
+                  <a:pt x="2676113" y="0"/>
+                </a:lnTo>
+                <a:lnTo>
+                  <a:pt x="2705521" y="0"/>
+                </a:lnTo>
+                <a:lnTo>
+                  <a:pt x="2734929" y="0"/>
+                </a:lnTo>
+                <a:lnTo>
+                  <a:pt x="2764336" y="0"/>
+                </a:lnTo>
+                <a:lnTo>
+                  <a:pt x="2793744" y="0"/>
+                </a:lnTo>
+                <a:lnTo>
+                  <a:pt x="2823152" y="0"/>
+                </a:lnTo>
+                <a:lnTo>
+                  <a:pt x="2852560" y="0"/>
+                </a:lnTo>
+                <a:lnTo>
+                  <a:pt x="2881968" y="0"/>
+                </a:lnTo>
+                <a:lnTo>
+                  <a:pt x="2911376" y="0"/>
+                </a:lnTo>
+                <a:lnTo>
+                  <a:pt x="2940783" y="0"/>
+                </a:lnTo>
+                <a:lnTo>
+                  <a:pt x="2970191" y="0"/>
+                </a:lnTo>
+                <a:lnTo>
+                  <a:pt x="2999599" y="0"/>
+                </a:lnTo>
+                <a:lnTo>
+                  <a:pt x="3029007" y="0"/>
+                </a:lnTo>
+                <a:lnTo>
+                  <a:pt x="3058415" y="0"/>
+                </a:lnTo>
+                <a:lnTo>
+                  <a:pt x="3087823" y="0"/>
+                </a:lnTo>
+                <a:lnTo>
+                  <a:pt x="3117230" y="0"/>
+                </a:lnTo>
+                <a:lnTo>
+                  <a:pt x="3146638" y="0"/>
+                </a:lnTo>
+                <a:lnTo>
+                  <a:pt x="3176046" y="0"/>
+                </a:lnTo>
+                <a:lnTo>
+                  <a:pt x="3205454" y="0"/>
+                </a:lnTo>
+                <a:lnTo>
+                  <a:pt x="3234862" y="0"/>
+                </a:lnTo>
+                <a:lnTo>
+                  <a:pt x="3264270" y="0"/>
+                </a:lnTo>
+                <a:lnTo>
+                  <a:pt x="3293677" y="0"/>
+                </a:lnTo>
+                <a:lnTo>
+                  <a:pt x="3323085" y="0"/>
+                </a:lnTo>
+                <a:lnTo>
+                  <a:pt x="3352493" y="0"/>
+                </a:lnTo>
+                <a:lnTo>
+                  <a:pt x="3381901" y="0"/>
+                </a:lnTo>
+                <a:lnTo>
+                  <a:pt x="3411309" y="0"/>
+                </a:lnTo>
+                <a:lnTo>
+                  <a:pt x="3440717" y="0"/>
+                </a:lnTo>
+                <a:lnTo>
+                  <a:pt x="3470125" y="0"/>
+                </a:lnTo>
+                <a:lnTo>
+                  <a:pt x="3499532" y="0"/>
+                </a:lnTo>
+                <a:lnTo>
+                  <a:pt x="3528940" y="0"/>
+                </a:lnTo>
+                <a:lnTo>
+                  <a:pt x="3558348" y="0"/>
+                </a:lnTo>
+                <a:lnTo>
+                  <a:pt x="3587756" y="0"/>
+                </a:lnTo>
+                <a:lnTo>
+                  <a:pt x="3617164" y="0"/>
+                </a:lnTo>
+                <a:lnTo>
+                  <a:pt x="3646572" y="0"/>
+                </a:lnTo>
+                <a:lnTo>
+                  <a:pt x="3675979" y="0"/>
+                </a:lnTo>
+                <a:lnTo>
+                  <a:pt x="3705387" y="0"/>
+                </a:lnTo>
+                <a:lnTo>
+                  <a:pt x="3734795" y="0"/>
+                </a:lnTo>
+                <a:lnTo>
+                  <a:pt x="3764203" y="0"/>
+                </a:lnTo>
+                <a:lnTo>
+                  <a:pt x="3793611" y="0"/>
+                </a:lnTo>
+                <a:lnTo>
+                  <a:pt x="3823019" y="0"/>
+                </a:lnTo>
+                <a:lnTo>
+                  <a:pt x="3852426" y="0"/>
+                </a:lnTo>
+                <a:lnTo>
+                  <a:pt x="3881834" y="0"/>
+                </a:lnTo>
+                <a:lnTo>
+                  <a:pt x="3911242" y="0"/>
+                </a:lnTo>
+                <a:lnTo>
+                  <a:pt x="3940650" y="0"/>
+                </a:lnTo>
+                <a:lnTo>
+                  <a:pt x="3970058" y="0"/>
+                </a:lnTo>
+                <a:lnTo>
+                  <a:pt x="3999466" y="0"/>
+                </a:lnTo>
+                <a:lnTo>
+                  <a:pt x="4028873" y="0"/>
+                </a:lnTo>
+                <a:lnTo>
+                  <a:pt x="4058281" y="0"/>
+                </a:lnTo>
+                <a:lnTo>
+                  <a:pt x="4087689" y="0"/>
+                </a:lnTo>
+                <a:lnTo>
+                  <a:pt x="4117097" y="0"/>
+                </a:lnTo>
+                <a:lnTo>
+                  <a:pt x="4146505" y="0"/>
+                </a:lnTo>
+                <a:lnTo>
+                  <a:pt x="4175913" y="0"/>
+                </a:lnTo>
+                <a:lnTo>
+                  <a:pt x="4205321" y="0"/>
+                </a:lnTo>
+                <a:lnTo>
+                  <a:pt x="4234728" y="0"/>
+                </a:lnTo>
+                <a:lnTo>
+                  <a:pt x="4264136" y="0"/>
+                </a:lnTo>
+                <a:lnTo>
+                  <a:pt x="4293544" y="0"/>
+                </a:lnTo>
+                <a:lnTo>
+                  <a:pt x="4322952" y="0"/>
+                </a:lnTo>
+                <a:lnTo>
+                  <a:pt x="4352360" y="0"/>
+                </a:lnTo>
+                <a:lnTo>
+                  <a:pt x="4381768" y="0"/>
+                </a:lnTo>
+                <a:lnTo>
+                  <a:pt x="4411175" y="0"/>
+                </a:lnTo>
+                <a:lnTo>
+                  <a:pt x="4440583" y="0"/>
+                </a:lnTo>
+                <a:lnTo>
+                  <a:pt x="4469991" y="0"/>
+                </a:lnTo>
+                <a:lnTo>
+                  <a:pt x="4499399" y="0"/>
+                </a:lnTo>
+                <a:lnTo>
+                  <a:pt x="4528807" y="0"/>
+                </a:lnTo>
+                <a:lnTo>
+                  <a:pt x="4558215" y="0"/>
+                </a:lnTo>
+                <a:lnTo>
+                  <a:pt x="4587622" y="0"/>
+                </a:lnTo>
+                <a:lnTo>
+                  <a:pt x="4617030" y="0"/>
+                </a:lnTo>
+                <a:lnTo>
+                  <a:pt x="4646438" y="0"/>
+                </a:lnTo>
+                <a:lnTo>
+                  <a:pt x="4675846" y="0"/>
+                </a:lnTo>
+                <a:lnTo>
+                  <a:pt x="4705254" y="0"/>
+                </a:lnTo>
+                <a:lnTo>
+                  <a:pt x="4734662" y="0"/>
+                </a:lnTo>
+                <a:lnTo>
+                  <a:pt x="4764069" y="0"/>
+                </a:lnTo>
+                <a:lnTo>
+                  <a:pt x="4793477" y="0"/>
+                </a:lnTo>
+                <a:lnTo>
+                  <a:pt x="4822885" y="0"/>
+                </a:lnTo>
+                <a:lnTo>
+                  <a:pt x="4852293" y="0"/>
+                </a:lnTo>
+                <a:lnTo>
+                  <a:pt x="4881701" y="0"/>
+                </a:lnTo>
+                <a:lnTo>
+                  <a:pt x="4911109" y="0"/>
+                </a:lnTo>
+                <a:lnTo>
+                  <a:pt x="4940516" y="0"/>
+                </a:lnTo>
+                <a:lnTo>
+                  <a:pt x="4969924" y="0"/>
+                </a:lnTo>
+                <a:lnTo>
+                  <a:pt x="4999332" y="0"/>
+                </a:lnTo>
+                <a:lnTo>
+                  <a:pt x="5028740" y="0"/>
+                </a:lnTo>
+                <a:lnTo>
+                  <a:pt x="5058148" y="0"/>
+                </a:lnTo>
+                <a:lnTo>
+                  <a:pt x="5087556" y="0"/>
+                </a:lnTo>
+                <a:lnTo>
+                  <a:pt x="5116964" y="0"/>
+                </a:lnTo>
+                <a:lnTo>
+                  <a:pt x="5146371" y="0"/>
+                </a:lnTo>
+                <a:lnTo>
+                  <a:pt x="5175779" y="0"/>
+                </a:lnTo>
+                <a:lnTo>
+                  <a:pt x="5205187" y="0"/>
+                </a:lnTo>
+                <a:lnTo>
+                  <a:pt x="5234595" y="0"/>
+                </a:lnTo>
+                <a:lnTo>
+                  <a:pt x="5264003" y="0"/>
+                </a:lnTo>
+                <a:lnTo>
+                  <a:pt x="5293411" y="0"/>
+                </a:lnTo>
+                <a:lnTo>
+                  <a:pt x="5322818" y="0"/>
+                </a:lnTo>
+                <a:lnTo>
+                  <a:pt x="5352226" y="0"/>
+                </a:lnTo>
+                <a:lnTo>
+                  <a:pt x="5381634" y="0"/>
+                </a:lnTo>
+                <a:lnTo>
+                  <a:pt x="5411042" y="0"/>
+                </a:lnTo>
+                <a:lnTo>
+                  <a:pt x="5440450" y="0"/>
+                </a:lnTo>
+                <a:lnTo>
+                  <a:pt x="5469858" y="0"/>
+                </a:lnTo>
+                <a:lnTo>
+                  <a:pt x="5499265" y="0"/>
+                </a:lnTo>
+                <a:lnTo>
+                  <a:pt x="5528673" y="0"/>
+                </a:lnTo>
+                <a:lnTo>
+                  <a:pt x="5558081" y="0"/>
+                </a:lnTo>
+                <a:lnTo>
+                  <a:pt x="5587489" y="0"/>
+                </a:lnTo>
+                <a:lnTo>
+                  <a:pt x="5616897" y="0"/>
+                </a:lnTo>
+                <a:lnTo>
+                  <a:pt x="5646305" y="0"/>
+                </a:lnTo>
+                <a:lnTo>
+                  <a:pt x="5675712" y="0"/>
+                </a:lnTo>
+                <a:lnTo>
+                  <a:pt x="5705120" y="0"/>
+                </a:lnTo>
+                <a:lnTo>
+                  <a:pt x="5734528" y="0"/>
+                </a:lnTo>
+                <a:lnTo>
+                  <a:pt x="5763936" y="0"/>
+                </a:lnTo>
+                <a:lnTo>
+                  <a:pt x="5793344" y="0"/>
+                </a:lnTo>
+                <a:lnTo>
+                  <a:pt x="5822752" y="0"/>
+                </a:lnTo>
+                <a:lnTo>
+                  <a:pt x="5852160" y="0"/>
+                </a:lnTo>
+                <a:lnTo>
+                  <a:pt x="5852160" y="0"/>
+                </a:lnTo>
+                <a:lnTo>
+                  <a:pt x="5822752" y="0"/>
+                </a:lnTo>
+                <a:lnTo>
+                  <a:pt x="5793344" y="0"/>
+                </a:lnTo>
+                <a:lnTo>
+                  <a:pt x="5763936" y="13364"/>
+                </a:lnTo>
+                <a:lnTo>
+                  <a:pt x="5734528" y="50455"/>
+                </a:lnTo>
+                <a:lnTo>
+                  <a:pt x="5705120" y="87357"/>
+                </a:lnTo>
+                <a:lnTo>
+                  <a:pt x="5675712" y="124069"/>
+                </a:lnTo>
+                <a:lnTo>
+                  <a:pt x="5646305" y="160591"/>
+                </a:lnTo>
+                <a:lnTo>
+                  <a:pt x="5616897" y="196923"/>
+                </a:lnTo>
+                <a:lnTo>
+                  <a:pt x="5587489" y="233066"/>
+                </a:lnTo>
+                <a:lnTo>
+                  <a:pt x="5558081" y="269018"/>
+                </a:lnTo>
+                <a:lnTo>
+                  <a:pt x="5528673" y="304782"/>
+                </a:lnTo>
+                <a:lnTo>
+                  <a:pt x="5499265" y="340355"/>
+                </a:lnTo>
+                <a:lnTo>
+                  <a:pt x="5469858" y="375739"/>
+                </a:lnTo>
+                <a:lnTo>
+                  <a:pt x="5440450" y="410933"/>
+                </a:lnTo>
+                <a:lnTo>
+                  <a:pt x="5411042" y="445937"/>
+                </a:lnTo>
+                <a:lnTo>
+                  <a:pt x="5381634" y="480751"/>
+                </a:lnTo>
+                <a:lnTo>
+                  <a:pt x="5352226" y="515376"/>
+                </a:lnTo>
+                <a:lnTo>
+                  <a:pt x="5322818" y="549811"/>
+                </a:lnTo>
+                <a:lnTo>
+                  <a:pt x="5293411" y="584057"/>
+                </a:lnTo>
+                <a:lnTo>
+                  <a:pt x="5264003" y="618112"/>
+                </a:lnTo>
+                <a:lnTo>
+                  <a:pt x="5234595" y="651978"/>
+                </a:lnTo>
+                <a:lnTo>
+                  <a:pt x="5205187" y="685654"/>
+                </a:lnTo>
+                <a:lnTo>
+                  <a:pt x="5175779" y="719141"/>
+                </a:lnTo>
+                <a:lnTo>
+                  <a:pt x="5146371" y="752437"/>
+                </a:lnTo>
+                <a:lnTo>
+                  <a:pt x="5116964" y="785544"/>
+                </a:lnTo>
+                <a:lnTo>
+                  <a:pt x="5087556" y="818462"/>
+                </a:lnTo>
+                <a:lnTo>
+                  <a:pt x="5058148" y="851189"/>
+                </a:lnTo>
+                <a:lnTo>
+                  <a:pt x="5028740" y="883727"/>
+                </a:lnTo>
+                <a:lnTo>
+                  <a:pt x="4999332" y="916075"/>
+                </a:lnTo>
+                <a:lnTo>
+                  <a:pt x="4969924" y="948234"/>
+                </a:lnTo>
+                <a:lnTo>
+                  <a:pt x="4940516" y="980202"/>
+                </a:lnTo>
+                <a:lnTo>
+                  <a:pt x="4911109" y="1011981"/>
+                </a:lnTo>
+                <a:lnTo>
+                  <a:pt x="4881701" y="1043570"/>
+                </a:lnTo>
+                <a:lnTo>
+                  <a:pt x="4852293" y="1074970"/>
+                </a:lnTo>
+                <a:lnTo>
+                  <a:pt x="4822885" y="1106179"/>
+                </a:lnTo>
+                <a:lnTo>
+                  <a:pt x="4793477" y="1137199"/>
+                </a:lnTo>
+                <a:lnTo>
+                  <a:pt x="4764069" y="1168030"/>
+                </a:lnTo>
+                <a:lnTo>
+                  <a:pt x="4734662" y="1198670"/>
+                </a:lnTo>
+                <a:lnTo>
+                  <a:pt x="4705254" y="1229121"/>
+                </a:lnTo>
+                <a:lnTo>
+                  <a:pt x="4675846" y="1259382"/>
+                </a:lnTo>
+                <a:lnTo>
+                  <a:pt x="4646438" y="1289454"/>
+                </a:lnTo>
+                <a:lnTo>
+                  <a:pt x="4617030" y="1319335"/>
+                </a:lnTo>
+                <a:lnTo>
+                  <a:pt x="4587622" y="1349027"/>
+                </a:lnTo>
+                <a:lnTo>
+                  <a:pt x="4558215" y="1378530"/>
+                </a:lnTo>
+                <a:lnTo>
+                  <a:pt x="4528807" y="1407842"/>
+                </a:lnTo>
+                <a:lnTo>
+                  <a:pt x="4499399" y="1436965"/>
+                </a:lnTo>
+                <a:lnTo>
+                  <a:pt x="4469991" y="1465898"/>
+                </a:lnTo>
+                <a:lnTo>
+                  <a:pt x="4440583" y="1494641"/>
+                </a:lnTo>
+                <a:lnTo>
+                  <a:pt x="4411175" y="1523195"/>
+                </a:lnTo>
+                <a:lnTo>
+                  <a:pt x="4381768" y="1551559"/>
+                </a:lnTo>
+                <a:lnTo>
+                  <a:pt x="4352360" y="1579733"/>
+                </a:lnTo>
+                <a:lnTo>
+                  <a:pt x="4322952" y="1607717"/>
+                </a:lnTo>
+                <a:lnTo>
+                  <a:pt x="4293544" y="1635512"/>
+                </a:lnTo>
+                <a:lnTo>
+                  <a:pt x="4264136" y="1663117"/>
+                </a:lnTo>
+                <a:lnTo>
+                  <a:pt x="4234728" y="1690532"/>
+                </a:lnTo>
+                <a:lnTo>
+                  <a:pt x="4205321" y="1717758"/>
+                </a:lnTo>
+                <a:lnTo>
+                  <a:pt x="4175913" y="1744793"/>
+                </a:lnTo>
+                <a:lnTo>
+                  <a:pt x="4146505" y="1771639"/>
+                </a:lnTo>
+                <a:lnTo>
+                  <a:pt x="4117097" y="1798296"/>
+                </a:lnTo>
+                <a:lnTo>
+                  <a:pt x="4087689" y="1824762"/>
+                </a:lnTo>
+                <a:lnTo>
+                  <a:pt x="4058281" y="1851039"/>
+                </a:lnTo>
+                <a:lnTo>
+                  <a:pt x="4028873" y="1877126"/>
+                </a:lnTo>
+                <a:lnTo>
+                  <a:pt x="3999466" y="1903024"/>
+                </a:lnTo>
+                <a:lnTo>
+                  <a:pt x="3970058" y="1928732"/>
+                </a:lnTo>
+                <a:lnTo>
+                  <a:pt x="3940650" y="1954250"/>
+                </a:lnTo>
+                <a:lnTo>
+                  <a:pt x="3911242" y="1979578"/>
+                </a:lnTo>
+                <a:lnTo>
+                  <a:pt x="3881834" y="2004716"/>
+                </a:lnTo>
+                <a:lnTo>
+                  <a:pt x="3852426" y="2029665"/>
+                </a:lnTo>
+                <a:lnTo>
+                  <a:pt x="3823019" y="2054424"/>
+                </a:lnTo>
+                <a:lnTo>
+                  <a:pt x="3793611" y="2078994"/>
+                </a:lnTo>
+                <a:lnTo>
+                  <a:pt x="3764203" y="2103373"/>
+                </a:lnTo>
+                <a:lnTo>
+                  <a:pt x="3734795" y="2127563"/>
+                </a:lnTo>
+                <a:lnTo>
+                  <a:pt x="3705387" y="2151563"/>
+                </a:lnTo>
+                <a:lnTo>
+                  <a:pt x="3675979" y="2175374"/>
+                </a:lnTo>
+                <a:lnTo>
+                  <a:pt x="3646572" y="2198995"/>
+                </a:lnTo>
+                <a:lnTo>
+                  <a:pt x="3617164" y="2222426"/>
+                </a:lnTo>
+                <a:lnTo>
+                  <a:pt x="3587756" y="2245667"/>
+                </a:lnTo>
+                <a:lnTo>
+                  <a:pt x="3558348" y="2268719"/>
+                </a:lnTo>
+                <a:lnTo>
+                  <a:pt x="3528940" y="2291580"/>
+                </a:lnTo>
+                <a:lnTo>
+                  <a:pt x="3499532" y="2314253"/>
+                </a:lnTo>
+                <a:lnTo>
+                  <a:pt x="3470125" y="2336735"/>
+                </a:lnTo>
+                <a:lnTo>
+                  <a:pt x="3440717" y="2359028"/>
+                </a:lnTo>
+                <a:lnTo>
+                  <a:pt x="3411309" y="2381131"/>
+                </a:lnTo>
+                <a:lnTo>
+                  <a:pt x="3381901" y="2403044"/>
+                </a:lnTo>
+                <a:lnTo>
+                  <a:pt x="3352493" y="2424767"/>
+                </a:lnTo>
+                <a:lnTo>
+                  <a:pt x="3323085" y="2446301"/>
+                </a:lnTo>
+                <a:lnTo>
+                  <a:pt x="3293677" y="2467645"/>
+                </a:lnTo>
+                <a:lnTo>
+                  <a:pt x="3264270" y="2488799"/>
+                </a:lnTo>
+                <a:lnTo>
+                  <a:pt x="3234862" y="2509764"/>
+                </a:lnTo>
+                <a:lnTo>
+                  <a:pt x="3205454" y="2530539"/>
+                </a:lnTo>
+                <a:lnTo>
+                  <a:pt x="3176046" y="2551124"/>
+                </a:lnTo>
+                <a:lnTo>
+                  <a:pt x="3146638" y="2571519"/>
+                </a:lnTo>
+                <a:lnTo>
+                  <a:pt x="3117230" y="2591725"/>
+                </a:lnTo>
+                <a:lnTo>
+                  <a:pt x="3087823" y="2611741"/>
+                </a:lnTo>
+                <a:lnTo>
+                  <a:pt x="3058415" y="2631567"/>
+                </a:lnTo>
+                <a:lnTo>
+                  <a:pt x="3029007" y="2651204"/>
+                </a:lnTo>
+                <a:lnTo>
+                  <a:pt x="2999599" y="2670651"/>
+                </a:lnTo>
+                <a:lnTo>
+                  <a:pt x="2970191" y="2689908"/>
+                </a:lnTo>
+                <a:lnTo>
+                  <a:pt x="2940783" y="2708975"/>
+                </a:lnTo>
+                <a:lnTo>
+                  <a:pt x="2911376" y="2727853"/>
+                </a:lnTo>
+                <a:lnTo>
+                  <a:pt x="2881968" y="2746541"/>
+                </a:lnTo>
+                <a:lnTo>
+                  <a:pt x="2852560" y="2765039"/>
+                </a:lnTo>
+                <a:lnTo>
+                  <a:pt x="2823152" y="2783347"/>
+                </a:lnTo>
+                <a:lnTo>
+                  <a:pt x="2793744" y="2801466"/>
+                </a:lnTo>
+                <a:lnTo>
+                  <a:pt x="2764336" y="2819395"/>
+                </a:lnTo>
+                <a:lnTo>
+                  <a:pt x="2734929" y="2837134"/>
+                </a:lnTo>
+                <a:lnTo>
+                  <a:pt x="2705521" y="2854684"/>
+                </a:lnTo>
+                <a:lnTo>
+                  <a:pt x="2676113" y="2872044"/>
+                </a:lnTo>
+                <a:lnTo>
+                  <a:pt x="2646705" y="2889214"/>
+                </a:lnTo>
+                <a:lnTo>
+                  <a:pt x="2617297" y="2906194"/>
+                </a:lnTo>
+                <a:lnTo>
+                  <a:pt x="2587889" y="2922985"/>
+                </a:lnTo>
+                <a:lnTo>
+                  <a:pt x="2558482" y="2939586"/>
+                </a:lnTo>
+                <a:lnTo>
+                  <a:pt x="2529074" y="2955997"/>
+                </a:lnTo>
+                <a:lnTo>
+                  <a:pt x="2499666" y="2972218"/>
+                </a:lnTo>
+                <a:lnTo>
+                  <a:pt x="2470258" y="2988250"/>
+                </a:lnTo>
+                <a:lnTo>
+                  <a:pt x="2440850" y="3004092"/>
+                </a:lnTo>
+                <a:lnTo>
+                  <a:pt x="2411442" y="3019744"/>
+                </a:lnTo>
+                <a:lnTo>
+                  <a:pt x="2382034" y="3035207"/>
+                </a:lnTo>
+                <a:lnTo>
+                  <a:pt x="2352627" y="3050480"/>
+                </a:lnTo>
+                <a:lnTo>
+                  <a:pt x="2323219" y="3065563"/>
+                </a:lnTo>
+                <a:lnTo>
+                  <a:pt x="2293811" y="3080456"/>
+                </a:lnTo>
+                <a:lnTo>
+                  <a:pt x="2264403" y="3095160"/>
+                </a:lnTo>
+                <a:lnTo>
+                  <a:pt x="2234995" y="3109674"/>
+                </a:lnTo>
+                <a:lnTo>
+                  <a:pt x="2205587" y="3123998"/>
+                </a:lnTo>
+                <a:lnTo>
+                  <a:pt x="2176180" y="3138133"/>
+                </a:lnTo>
+                <a:lnTo>
+                  <a:pt x="2146772" y="3152078"/>
+                </a:lnTo>
+                <a:lnTo>
+                  <a:pt x="2117364" y="3165833"/>
+                </a:lnTo>
+                <a:lnTo>
+                  <a:pt x="2087956" y="3179398"/>
+                </a:lnTo>
+                <a:lnTo>
+                  <a:pt x="2058548" y="3192774"/>
+                </a:lnTo>
+                <a:lnTo>
+                  <a:pt x="2029140" y="3205959"/>
+                </a:lnTo>
+                <a:lnTo>
+                  <a:pt x="1999733" y="3218956"/>
+                </a:lnTo>
+                <a:lnTo>
+                  <a:pt x="1970325" y="3231762"/>
+                </a:lnTo>
+                <a:lnTo>
+                  <a:pt x="1940917" y="3244379"/>
+                </a:lnTo>
+                <a:lnTo>
+                  <a:pt x="1911509" y="3256806"/>
+                </a:lnTo>
+                <a:lnTo>
+                  <a:pt x="1882101" y="3269043"/>
+                </a:lnTo>
+                <a:lnTo>
+                  <a:pt x="1852693" y="3281090"/>
+                </a:lnTo>
+                <a:lnTo>
+                  <a:pt x="1823286" y="3292948"/>
+                </a:lnTo>
+                <a:lnTo>
+                  <a:pt x="1793878" y="3304616"/>
+                </a:lnTo>
+                <a:lnTo>
+                  <a:pt x="1764470" y="3316095"/>
+                </a:lnTo>
+                <a:lnTo>
+                  <a:pt x="1735062" y="3327383"/>
+                </a:lnTo>
+                <a:lnTo>
+                  <a:pt x="1705654" y="3338482"/>
+                </a:lnTo>
+                <a:lnTo>
+                  <a:pt x="1676246" y="3349391"/>
+                </a:lnTo>
+                <a:lnTo>
+                  <a:pt x="1646838" y="3360111"/>
+                </a:lnTo>
+                <a:lnTo>
+                  <a:pt x="1617431" y="3370641"/>
+                </a:lnTo>
+                <a:lnTo>
+                  <a:pt x="1588023" y="3380981"/>
+                </a:lnTo>
+                <a:lnTo>
+                  <a:pt x="1558615" y="3391131"/>
+                </a:lnTo>
+                <a:lnTo>
+                  <a:pt x="1529207" y="3401091"/>
+                </a:lnTo>
+                <a:lnTo>
+                  <a:pt x="1499799" y="3410862"/>
+                </a:lnTo>
+                <a:lnTo>
+                  <a:pt x="1470391" y="3420443"/>
+                </a:lnTo>
+                <a:lnTo>
+                  <a:pt x="1440984" y="3429835"/>
+                </a:lnTo>
+                <a:lnTo>
+                  <a:pt x="1411576" y="3439036"/>
+                </a:lnTo>
+                <a:lnTo>
+                  <a:pt x="1382168" y="3448048"/>
+                </a:lnTo>
+                <a:lnTo>
+                  <a:pt x="1352760" y="3456871"/>
+                </a:lnTo>
+                <a:lnTo>
+                  <a:pt x="1323352" y="3465503"/>
+                </a:lnTo>
+                <a:lnTo>
+                  <a:pt x="1293944" y="3473946"/>
+                </a:lnTo>
+                <a:lnTo>
+                  <a:pt x="1264537" y="3482199"/>
+                </a:lnTo>
+                <a:lnTo>
+                  <a:pt x="1235129" y="3490262"/>
+                </a:lnTo>
+                <a:lnTo>
+                  <a:pt x="1205721" y="3498136"/>
+                </a:lnTo>
+                <a:lnTo>
+                  <a:pt x="1176313" y="3505820"/>
+                </a:lnTo>
+                <a:lnTo>
+                  <a:pt x="1146905" y="3513314"/>
+                </a:lnTo>
+                <a:lnTo>
+                  <a:pt x="1117497" y="3520618"/>
+                </a:lnTo>
+                <a:lnTo>
+                  <a:pt x="1088090" y="3527733"/>
+                </a:lnTo>
+                <a:lnTo>
+                  <a:pt x="1058682" y="3534658"/>
+                </a:lnTo>
+                <a:lnTo>
+                  <a:pt x="1029274" y="3541393"/>
+                </a:lnTo>
+                <a:lnTo>
+                  <a:pt x="999866" y="3547939"/>
+                </a:lnTo>
+                <a:lnTo>
+                  <a:pt x="970458" y="3554294"/>
+                </a:lnTo>
+                <a:lnTo>
+                  <a:pt x="941050" y="3560460"/>
+                </a:lnTo>
+                <a:lnTo>
+                  <a:pt x="911643" y="3566437"/>
+                </a:lnTo>
+                <a:lnTo>
+                  <a:pt x="882235" y="3572223"/>
+                </a:lnTo>
+                <a:lnTo>
+                  <a:pt x="852827" y="3577820"/>
+                </a:lnTo>
+                <a:lnTo>
+                  <a:pt x="823419" y="3583227"/>
+                </a:lnTo>
+                <a:lnTo>
+                  <a:pt x="794011" y="3588445"/>
+                </a:lnTo>
+                <a:lnTo>
+                  <a:pt x="764603" y="3593472"/>
+                </a:lnTo>
+                <a:lnTo>
+                  <a:pt x="735195" y="3598310"/>
+                </a:lnTo>
+                <a:lnTo>
+                  <a:pt x="705788" y="3602959"/>
+                </a:lnTo>
+                <a:lnTo>
+                  <a:pt x="676380" y="3607417"/>
+                </a:lnTo>
+                <a:lnTo>
+                  <a:pt x="646972" y="3611686"/>
+                </a:lnTo>
+                <a:lnTo>
+                  <a:pt x="617564" y="3615765"/>
+                </a:lnTo>
+                <a:lnTo>
+                  <a:pt x="588156" y="3619655"/>
+                </a:lnTo>
+                <a:lnTo>
+                  <a:pt x="558748" y="3623354"/>
+                </a:lnTo>
+                <a:lnTo>
+                  <a:pt x="529341" y="3626864"/>
+                </a:lnTo>
+                <a:lnTo>
+                  <a:pt x="499933" y="3630184"/>
+                </a:lnTo>
+                <a:lnTo>
+                  <a:pt x="470525" y="3633315"/>
+                </a:lnTo>
+                <a:lnTo>
+                  <a:pt x="441117" y="3636255"/>
+                </a:lnTo>
+                <a:lnTo>
+                  <a:pt x="411709" y="3639006"/>
+                </a:lnTo>
+                <a:lnTo>
+                  <a:pt x="382301" y="3641568"/>
+                </a:lnTo>
+                <a:lnTo>
+                  <a:pt x="352894" y="3643939"/>
+                </a:lnTo>
+                <a:lnTo>
+                  <a:pt x="323486" y="3646121"/>
+                </a:lnTo>
+                <a:lnTo>
+                  <a:pt x="294078" y="3648113"/>
+                </a:lnTo>
+                <a:lnTo>
+                  <a:pt x="264670" y="3649916"/>
+                </a:lnTo>
+                <a:lnTo>
+                  <a:pt x="235262" y="3651528"/>
+                </a:lnTo>
+                <a:lnTo>
+                  <a:pt x="205854" y="3652951"/>
+                </a:lnTo>
+                <a:lnTo>
+                  <a:pt x="176447" y="3654184"/>
+                </a:lnTo>
+                <a:lnTo>
+                  <a:pt x="147039" y="3655228"/>
+                </a:lnTo>
+                <a:lnTo>
+                  <a:pt x="117631" y="3656082"/>
+                </a:lnTo>
+                <a:lnTo>
+                  <a:pt x="88223" y="3656746"/>
+                </a:lnTo>
+                <a:lnTo>
+                  <a:pt x="58815" y="3657220"/>
+                </a:lnTo>
+                <a:lnTo>
+                  <a:pt x="29407" y="3657505"/>
+                </a:lnTo>
+                <a:lnTo>
+                  <a:pt x="0" y="3657600"/>
+                </a:lnTo>
+                <a:close/>
+              </a:path>
+            </a:pathLst>
+          </a:custGeom>
+          <a:solidFill>
+            <a:srgbClr val="8EDBD4">
+              <a:alpha val="18000"/>
+            </a:srgbClr>
+          </a:solidFill>
+          <a:ln w="10160">
+            <a:solidFill>
+              <a:srgbClr val="8EDBD4">
+                <a:alpha val="18000"/>
+              </a:srgbClr>
+            </a:solidFill>
+          </a:ln>
+          <a:effectLst/>
+        </p:spPr>
+        <p:txBody>
+          <a:bodyPr rtlCol="0" anchor="ctr"/>
+          <a:lstStyle/>
+          <a:p>
+            <a:pPr algn="ctr"/>
+          </a:p>
+        </p:txBody>
+      </p:sp>
+      <p:sp>
+        <p:nvSpPr>
+          <p:cNvPr id="33" name="C3-E18 polygon 31" descr="sci-ppt:o031"/>
+          <p:cNvSpPr/>
+          <p:nvPr/>
+        </p:nvSpPr>
+        <p:spPr>
+          <a:xfrm>
+            <a:off x="914400" y="1384964"/>
+            <a:ext cx="5763936" cy="3644236"/>
+          </a:xfrm>
+          <a:custGeom>
+            <a:avLst/>
+            <a:gdLst/>
+            <a:ahLst/>
+            <a:cxnLst/>
+            <a:rect l="l" t="t" r="r" b="b"/>
+            <a:pathLst>
+              <a:path w="5763936" h="3644236">
+                <a:moveTo>
+                  <a:pt x="0" y="3644236"/>
+                </a:moveTo>
+                <a:lnTo>
+                  <a:pt x="29407" y="3644141"/>
+                </a:lnTo>
+                <a:lnTo>
+                  <a:pt x="58815" y="3643856"/>
+                </a:lnTo>
+                <a:lnTo>
+                  <a:pt x="88223" y="3643382"/>
+                </a:lnTo>
+                <a:lnTo>
+                  <a:pt x="117631" y="3642718"/>
+                </a:lnTo>
+                <a:lnTo>
+                  <a:pt x="147039" y="3641864"/>
+                </a:lnTo>
+                <a:lnTo>
+                  <a:pt x="176447" y="3640820"/>
+                </a:lnTo>
+                <a:lnTo>
+                  <a:pt x="205854" y="3639587"/>
+                </a:lnTo>
+                <a:lnTo>
+                  <a:pt x="235262" y="3638164"/>
+                </a:lnTo>
+                <a:lnTo>
+                  <a:pt x="264670" y="3636552"/>
+                </a:lnTo>
+                <a:lnTo>
+                  <a:pt x="294078" y="3634749"/>
+                </a:lnTo>
+                <a:lnTo>
+                  <a:pt x="323486" y="3632757"/>
+                </a:lnTo>
+                <a:lnTo>
+                  <a:pt x="352894" y="3630575"/>
+                </a:lnTo>
+                <a:lnTo>
+                  <a:pt x="382301" y="3628204"/>
+                </a:lnTo>
+                <a:lnTo>
+                  <a:pt x="411709" y="3625642"/>
+                </a:lnTo>
+                <a:lnTo>
+                  <a:pt x="441117" y="3622891"/>
+                </a:lnTo>
+                <a:lnTo>
+                  <a:pt x="470525" y="3619951"/>
+                </a:lnTo>
+                <a:lnTo>
+                  <a:pt x="499933" y="3616820"/>
+                </a:lnTo>
+                <a:lnTo>
+                  <a:pt x="529341" y="3613500"/>
+                </a:lnTo>
+                <a:lnTo>
+                  <a:pt x="558748" y="3609990"/>
+                </a:lnTo>
+                <a:lnTo>
+                  <a:pt x="588156" y="3606291"/>
+                </a:lnTo>
+                <a:lnTo>
+                  <a:pt x="617564" y="3602401"/>
+                </a:lnTo>
+                <a:lnTo>
+                  <a:pt x="646972" y="3598322"/>
+                </a:lnTo>
+                <a:lnTo>
+                  <a:pt x="676380" y="3594053"/>
+                </a:lnTo>
+                <a:lnTo>
+                  <a:pt x="705788" y="3589595"/>
+                </a:lnTo>
+                <a:lnTo>
+                  <a:pt x="735195" y="3584946"/>
+                </a:lnTo>
+                <a:lnTo>
+                  <a:pt x="764603" y="3580108"/>
+                </a:lnTo>
+                <a:lnTo>
+                  <a:pt x="794011" y="3575081"/>
+                </a:lnTo>
+                <a:lnTo>
+                  <a:pt x="823419" y="3569863"/>
+                </a:lnTo>
+                <a:lnTo>
+                  <a:pt x="852827" y="3564456"/>
+                </a:lnTo>
+                <a:lnTo>
+                  <a:pt x="882235" y="3558859"/>
+                </a:lnTo>
+                <a:lnTo>
+                  <a:pt x="911643" y="3553073"/>
+                </a:lnTo>
+                <a:lnTo>
+                  <a:pt x="941050" y="3547096"/>
+                </a:lnTo>
+                <a:lnTo>
+                  <a:pt x="970458" y="3540930"/>
+                </a:lnTo>
+                <a:lnTo>
+                  <a:pt x="999866" y="3534575"/>
+                </a:lnTo>
+                <a:lnTo>
+                  <a:pt x="1029274" y="3528029"/>
+                </a:lnTo>
+                <a:lnTo>
+                  <a:pt x="1058682" y="3521294"/>
+                </a:lnTo>
+                <a:lnTo>
+                  <a:pt x="1088090" y="3514369"/>
+                </a:lnTo>
+                <a:lnTo>
+                  <a:pt x="1117497" y="3507254"/>
+                </a:lnTo>
+                <a:lnTo>
+                  <a:pt x="1146905" y="3499950"/>
+                </a:lnTo>
+                <a:lnTo>
+                  <a:pt x="1176313" y="3492456"/>
+                </a:lnTo>
+                <a:lnTo>
+                  <a:pt x="1205721" y="3484772"/>
+                </a:lnTo>
+                <a:lnTo>
+                  <a:pt x="1235129" y="3476898"/>
+                </a:lnTo>
+                <a:lnTo>
+                  <a:pt x="1264537" y="3468835"/>
+                </a:lnTo>
+                <a:lnTo>
+                  <a:pt x="1293944" y="3460582"/>
+                </a:lnTo>
+                <a:lnTo>
+                  <a:pt x="1323352" y="3452139"/>
+                </a:lnTo>
+                <a:lnTo>
+                  <a:pt x="1352760" y="3443507"/>
+                </a:lnTo>
+                <a:lnTo>
+                  <a:pt x="1382168" y="3434684"/>
+                </a:lnTo>
+                <a:lnTo>
+                  <a:pt x="1411576" y="3425672"/>
+                </a:lnTo>
+                <a:lnTo>
+                  <a:pt x="1440984" y="3416471"/>
+                </a:lnTo>
+                <a:lnTo>
+                  <a:pt x="1470391" y="3407079"/>
+                </a:lnTo>
+                <a:lnTo>
+                  <a:pt x="1499799" y="3397498"/>
+                </a:lnTo>
+                <a:lnTo>
+                  <a:pt x="1529207" y="3387727"/>
+                </a:lnTo>
+                <a:lnTo>
+                  <a:pt x="1558615" y="3377767"/>
+                </a:lnTo>
+                <a:lnTo>
+                  <a:pt x="1588023" y="3367617"/>
+                </a:lnTo>
+                <a:lnTo>
+                  <a:pt x="1617431" y="3357277"/>
+                </a:lnTo>
+                <a:lnTo>
+                  <a:pt x="1646838" y="3346747"/>
+                </a:lnTo>
+                <a:lnTo>
+                  <a:pt x="1676246" y="3336027"/>
+                </a:lnTo>
+                <a:lnTo>
+                  <a:pt x="1705654" y="3325118"/>
+                </a:lnTo>
+                <a:lnTo>
+                  <a:pt x="1735062" y="3314019"/>
+                </a:lnTo>
+                <a:lnTo>
+                  <a:pt x="1764470" y="3302731"/>
+                </a:lnTo>
+                <a:lnTo>
+                  <a:pt x="1793878" y="3291252"/>
+                </a:lnTo>
+                <a:lnTo>
+                  <a:pt x="1823286" y="3279584"/>
+                </a:lnTo>
+                <a:lnTo>
+                  <a:pt x="1852693" y="3267726"/>
+                </a:lnTo>
+                <a:lnTo>
+                  <a:pt x="1882101" y="3255679"/>
+                </a:lnTo>
+                <a:lnTo>
+                  <a:pt x="1911509" y="3243442"/>
+                </a:lnTo>
+                <a:lnTo>
+                  <a:pt x="1940917" y="3231015"/>
+                </a:lnTo>
+                <a:lnTo>
+                  <a:pt x="1970325" y="3218398"/>
+                </a:lnTo>
+                <a:lnTo>
+                  <a:pt x="1999733" y="3205592"/>
+                </a:lnTo>
+                <a:lnTo>
+                  <a:pt x="2029140" y="3192595"/>
+                </a:lnTo>
+                <a:lnTo>
+                  <a:pt x="2058548" y="3179410"/>
+                </a:lnTo>
+                <a:lnTo>
+                  <a:pt x="2087956" y="3166034"/>
+                </a:lnTo>
+                <a:lnTo>
+                  <a:pt x="2117364" y="3152469"/>
+                </a:lnTo>
+                <a:lnTo>
+                  <a:pt x="2146772" y="3138714"/>
+                </a:lnTo>
+                <a:lnTo>
+                  <a:pt x="2176180" y="3124769"/>
+                </a:lnTo>
+                <a:lnTo>
+                  <a:pt x="2205587" y="3110634"/>
+                </a:lnTo>
+                <a:lnTo>
+                  <a:pt x="2234995" y="3096310"/>
+                </a:lnTo>
+                <a:lnTo>
+                  <a:pt x="2264403" y="3081796"/>
+                </a:lnTo>
+                <a:lnTo>
+                  <a:pt x="2293811" y="3067092"/>
+                </a:lnTo>
+                <a:lnTo>
+                  <a:pt x="2323219" y="3052199"/>
+                </a:lnTo>
+                <a:lnTo>
+                  <a:pt x="2352627" y="3037116"/>
+                </a:lnTo>
+                <a:lnTo>
+                  <a:pt x="2382034" y="3021843"/>
+                </a:lnTo>
+                <a:lnTo>
+                  <a:pt x="2411442" y="3006380"/>
+                </a:lnTo>
+                <a:lnTo>
+                  <a:pt x="2440850" y="2990728"/>
+                </a:lnTo>
+                <a:lnTo>
+                  <a:pt x="2470258" y="2974886"/>
+                </a:lnTo>
+                <a:lnTo>
+                  <a:pt x="2499666" y="2958854"/>
+                </a:lnTo>
+                <a:lnTo>
+                  <a:pt x="2529074" y="2942633"/>
+                </a:lnTo>
+                <a:lnTo>
+                  <a:pt x="2558482" y="2926222"/>
+                </a:lnTo>
+                <a:lnTo>
+                  <a:pt x="2587889" y="2909621"/>
+                </a:lnTo>
+                <a:lnTo>
+                  <a:pt x="2617297" y="2892830"/>
+                </a:lnTo>
+                <a:lnTo>
+                  <a:pt x="2646705" y="2875850"/>
+                </a:lnTo>
+                <a:lnTo>
+                  <a:pt x="2676113" y="2858680"/>
+                </a:lnTo>
+                <a:lnTo>
+                  <a:pt x="2705521" y="2841320"/>
+                </a:lnTo>
+                <a:lnTo>
+                  <a:pt x="2734929" y="2823770"/>
+                </a:lnTo>
+                <a:lnTo>
+                  <a:pt x="2764336" y="2806031"/>
+                </a:lnTo>
+                <a:lnTo>
+                  <a:pt x="2793744" y="2788102"/>
+                </a:lnTo>
+                <a:lnTo>
+                  <a:pt x="2823152" y="2769983"/>
+                </a:lnTo>
+                <a:lnTo>
+                  <a:pt x="2852560" y="2751675"/>
+                </a:lnTo>
+                <a:lnTo>
+                  <a:pt x="2881968" y="2733177"/>
+                </a:lnTo>
+                <a:lnTo>
+                  <a:pt x="2911376" y="2714489"/>
+                </a:lnTo>
+                <a:lnTo>
+                  <a:pt x="2940783" y="2695611"/>
+                </a:lnTo>
+                <a:lnTo>
+                  <a:pt x="2970191" y="2676544"/>
+                </a:lnTo>
+                <a:lnTo>
+                  <a:pt x="2999599" y="2657287"/>
+                </a:lnTo>
+                <a:lnTo>
+                  <a:pt x="3029007" y="2637840"/>
+                </a:lnTo>
+                <a:lnTo>
+                  <a:pt x="3058415" y="2618203"/>
+                </a:lnTo>
+                <a:lnTo>
+                  <a:pt x="3087823" y="2598377"/>
+                </a:lnTo>
+                <a:lnTo>
+                  <a:pt x="3117230" y="2578361"/>
+                </a:lnTo>
+                <a:lnTo>
+                  <a:pt x="3146638" y="2558155"/>
+                </a:lnTo>
+                <a:lnTo>
+                  <a:pt x="3176046" y="2537760"/>
+                </a:lnTo>
+                <a:lnTo>
+                  <a:pt x="3205454" y="2517175"/>
+                </a:lnTo>
+                <a:lnTo>
+                  <a:pt x="3234862" y="2496400"/>
+                </a:lnTo>
+                <a:lnTo>
+                  <a:pt x="3264270" y="2475435"/>
+                </a:lnTo>
+                <a:lnTo>
+                  <a:pt x="3293677" y="2454281"/>
+                </a:lnTo>
+                <a:lnTo>
+                  <a:pt x="3323085" y="2432937"/>
+                </a:lnTo>
+                <a:lnTo>
+                  <a:pt x="3352493" y="2411403"/>
+                </a:lnTo>
+                <a:lnTo>
+                  <a:pt x="3381901" y="2389680"/>
+                </a:lnTo>
+                <a:lnTo>
+                  <a:pt x="3411309" y="2367767"/>
+                </a:lnTo>
+                <a:lnTo>
+                  <a:pt x="3440717" y="2345664"/>
+                </a:lnTo>
+                <a:lnTo>
+                  <a:pt x="3470125" y="2323371"/>
+                </a:lnTo>
+                <a:lnTo>
+                  <a:pt x="3499532" y="2300889"/>
+                </a:lnTo>
+                <a:lnTo>
+                  <a:pt x="3528940" y="2278216"/>
+                </a:lnTo>
+                <a:lnTo>
+                  <a:pt x="3558348" y="2255355"/>
+                </a:lnTo>
+                <a:lnTo>
+                  <a:pt x="3587756" y="2232303"/>
+                </a:lnTo>
+                <a:lnTo>
+                  <a:pt x="3617164" y="2209062"/>
+                </a:lnTo>
+                <a:lnTo>
+                  <a:pt x="3646572" y="2185631"/>
+                </a:lnTo>
+                <a:lnTo>
+                  <a:pt x="3675979" y="2162010"/>
+                </a:lnTo>
+                <a:lnTo>
+                  <a:pt x="3705387" y="2138199"/>
+                </a:lnTo>
+                <a:lnTo>
+                  <a:pt x="3734795" y="2114199"/>
+                </a:lnTo>
+                <a:lnTo>
+                  <a:pt x="3764203" y="2090009"/>
+                </a:lnTo>
+                <a:lnTo>
+                  <a:pt x="3793611" y="2065630"/>
+                </a:lnTo>
+                <a:lnTo>
+                  <a:pt x="3823019" y="2041060"/>
+                </a:lnTo>
+                <a:lnTo>
+                  <a:pt x="3852426" y="2016301"/>
+                </a:lnTo>
+                <a:lnTo>
+                  <a:pt x="3881834" y="1991352"/>
+                </a:lnTo>
+                <a:lnTo>
+                  <a:pt x="3911242" y="1966214"/>
+                </a:lnTo>
+                <a:lnTo>
+                  <a:pt x="3940650" y="1940886"/>
+                </a:lnTo>
+                <a:lnTo>
+                  <a:pt x="3970058" y="1915368"/>
+                </a:lnTo>
+                <a:lnTo>
+                  <a:pt x="3999466" y="1889660"/>
+                </a:lnTo>
+                <a:lnTo>
+                  <a:pt x="4028873" y="1863762"/>
+                </a:lnTo>
+                <a:lnTo>
+                  <a:pt x="4058281" y="1837675"/>
+                </a:lnTo>
+                <a:lnTo>
+                  <a:pt x="4087689" y="1811398"/>
+                </a:lnTo>
+                <a:lnTo>
+                  <a:pt x="4117097" y="1784932"/>
+                </a:lnTo>
+                <a:lnTo>
+                  <a:pt x="4146505" y="1758275"/>
+                </a:lnTo>
+                <a:lnTo>
+                  <a:pt x="4175913" y="1731429"/>
+                </a:lnTo>
+                <a:lnTo>
+                  <a:pt x="4205321" y="1704394"/>
+                </a:lnTo>
+                <a:lnTo>
+                  <a:pt x="4234728" y="1677168"/>
+                </a:lnTo>
+                <a:lnTo>
+                  <a:pt x="4264136" y="1649753"/>
+                </a:lnTo>
+                <a:lnTo>
+                  <a:pt x="4293544" y="1622148"/>
+                </a:lnTo>
+                <a:lnTo>
+                  <a:pt x="4322952" y="1594353"/>
+                </a:lnTo>
+                <a:lnTo>
+                  <a:pt x="4352360" y="1566369"/>
+                </a:lnTo>
+                <a:lnTo>
+                  <a:pt x="4381768" y="1538195"/>
+                </a:lnTo>
+                <a:lnTo>
+                  <a:pt x="4411175" y="1509831"/>
+                </a:lnTo>
+                <a:lnTo>
+                  <a:pt x="4440583" y="1481277"/>
+                </a:lnTo>
+                <a:lnTo>
+                  <a:pt x="4469991" y="1452534"/>
+                </a:lnTo>
+                <a:lnTo>
+                  <a:pt x="4499399" y="1423601"/>
+                </a:lnTo>
+                <a:lnTo>
+                  <a:pt x="4528807" y="1394478"/>
+                </a:lnTo>
+                <a:lnTo>
+                  <a:pt x="4558215" y="1365166"/>
+                </a:lnTo>
+                <a:lnTo>
+                  <a:pt x="4587622" y="1335663"/>
+                </a:lnTo>
+                <a:lnTo>
+                  <a:pt x="4617030" y="1305971"/>
+                </a:lnTo>
+                <a:lnTo>
+                  <a:pt x="4646438" y="1276090"/>
+                </a:lnTo>
+                <a:lnTo>
+                  <a:pt x="4675846" y="1246018"/>
+                </a:lnTo>
+                <a:lnTo>
+                  <a:pt x="4705254" y="1215757"/>
+                </a:lnTo>
+                <a:lnTo>
+                  <a:pt x="4734662" y="1185306"/>
+                </a:lnTo>
+                <a:lnTo>
+                  <a:pt x="4764069" y="1154666"/>
+                </a:lnTo>
+                <a:lnTo>
+                  <a:pt x="4793477" y="1123835"/>
+                </a:lnTo>
+                <a:lnTo>
+                  <a:pt x="4822885" y="1092815"/>
+                </a:lnTo>
+                <a:lnTo>
+                  <a:pt x="4852293" y="1061606"/>
+                </a:lnTo>
+                <a:lnTo>
+                  <a:pt x="4881701" y="1030206"/>
+                </a:lnTo>
+                <a:lnTo>
+                  <a:pt x="4911109" y="998617"/>
+                </a:lnTo>
+                <a:lnTo>
+                  <a:pt x="4940516" y="966838"/>
+                </a:lnTo>
+                <a:lnTo>
+                  <a:pt x="4969924" y="934870"/>
+                </a:lnTo>
+                <a:lnTo>
+                  <a:pt x="4999332" y="902711"/>
+                </a:lnTo>
+                <a:lnTo>
+                  <a:pt x="5028740" y="870363"/>
+                </a:lnTo>
+                <a:lnTo>
+                  <a:pt x="5058148" y="837825"/>
+                </a:lnTo>
+                <a:lnTo>
+                  <a:pt x="5087556" y="805098"/>
+                </a:lnTo>
+                <a:lnTo>
+                  <a:pt x="5116964" y="772180"/>
+                </a:lnTo>
+                <a:lnTo>
+                  <a:pt x="5146371" y="739073"/>
+                </a:lnTo>
+                <a:lnTo>
+                  <a:pt x="5175779" y="705777"/>
+                </a:lnTo>
+                <a:lnTo>
+                  <a:pt x="5205187" y="672290"/>
+                </a:lnTo>
+                <a:lnTo>
+                  <a:pt x="5234595" y="638614"/>
+                </a:lnTo>
+                <a:lnTo>
+                  <a:pt x="5264003" y="604748"/>
+                </a:lnTo>
+                <a:lnTo>
+                  <a:pt x="5293411" y="570693"/>
+                </a:lnTo>
+                <a:lnTo>
+                  <a:pt x="5322818" y="536447"/>
+                </a:lnTo>
+                <a:lnTo>
+                  <a:pt x="5352226" y="502012"/>
+                </a:lnTo>
+                <a:lnTo>
+                  <a:pt x="5381634" y="467387"/>
+                </a:lnTo>
+                <a:lnTo>
+                  <a:pt x="5411042" y="432573"/>
+                </a:lnTo>
+                <a:lnTo>
+                  <a:pt x="5440450" y="397569"/>
+                </a:lnTo>
+                <a:lnTo>
+                  <a:pt x="5469858" y="362375"/>
+                </a:lnTo>
+                <a:lnTo>
+                  <a:pt x="5499265" y="326991"/>
+                </a:lnTo>
+                <a:lnTo>
+                  <a:pt x="5528673" y="291418"/>
+                </a:lnTo>
+                <a:lnTo>
+                  <a:pt x="5558081" y="255654"/>
+                </a:lnTo>
+                <a:lnTo>
+                  <a:pt x="5587489" y="219702"/>
+                </a:lnTo>
+                <a:lnTo>
+                  <a:pt x="5616897" y="183559"/>
+                </a:lnTo>
+                <a:lnTo>
+                  <a:pt x="5646305" y="147227"/>
+                </a:lnTo>
+                <a:lnTo>
+                  <a:pt x="5675712" y="110705"/>
+                </a:lnTo>
+                <a:lnTo>
+                  <a:pt x="5705120" y="73993"/>
+                </a:lnTo>
+                <a:lnTo>
+                  <a:pt x="5734528" y="37091"/>
+                </a:lnTo>
+                <a:lnTo>
+                  <a:pt x="5763936" y="0"/>
+                </a:lnTo>
+              </a:path>
+            </a:pathLst>
+          </a:custGeom>
+          <a:noFill/>
+          <a:ln w="38100">
             <a:solidFill>
               <a:srgbClr val="8EDBD4"/>
             </a:solidFill>
           </a:ln>
           <a:effectLst/>
         </p:spPr>
-      </p:cxnSp>
-      <p:sp>
-        <p:nvSpPr>
-          <p:cNvPr id="9" name="C3-E18 text 7" descr="sci-ppt:o007"/>
+        <p:txBody>
+          <a:bodyPr rtlCol="0" anchor="ctr"/>
+          <a:lstStyle/>
+          <a:p>
+            <a:pPr algn="ctr"/>
+          </a:p>
+        </p:txBody>
+      </p:sp>
+      <p:sp>
+        <p:nvSpPr>
+          <p:cNvPr id="34" name="C3-E18 ellipse 32" descr="sci-ppt:o032"/>
+          <p:cNvSpPr/>
+          <p:nvPr/>
+        </p:nvSpPr>
+        <p:spPr>
+          <a:xfrm>
+            <a:off x="4175154" y="3736848"/>
+            <a:ext cx="146304" cy="146304"/>
+          </a:xfrm>
+          <a:prstGeom prst="ellipse">
+            <a:avLst/>
+          </a:prstGeom>
+          <a:solidFill>
+            <a:srgbClr val="F2B880"/>
+          </a:solidFill>
+          <a:ln w="12700">
+            <a:solidFill>
+              <a:srgbClr val="F2B880"/>
+            </a:solidFill>
+          </a:ln>
+          <a:effectLst/>
+        </p:spPr>
+        <p:txBody>
+          <a:bodyPr rtlCol="0" anchor="ctr"/>
+          <a:lstStyle/>
+          <a:p>
+            <a:pPr algn="ctr"/>
+          </a:p>
+        </p:txBody>
+      </p:sp>
+      <p:sp>
+        <p:nvSpPr>
+          <p:cNvPr id="35" name="C3-E18 text 33" descr="sci-ppt:o033"/>
           <p:cNvSpPr txBox="1"/>
           <p:nvPr/>
         </p:nvSpPr>
         <p:spPr>
           <a:xfrm>
-            <a:off x="137160" y="2377440"/>
-            <a:ext cx="1645920" cy="320040"/>
+            <a:off x="4358034" y="4038600"/>
+            <a:ext cx="2377440" cy="231648"/>
           </a:xfrm>
           <a:prstGeom prst="rect">
             <a:avLst/>
@@ -3334,7 +5878,7 @@
           <a:effectLst/>
         </p:spPr>
         <p:txBody>
-          <a:bodyPr wrap="square" lIns="27432" rIns="27432" tIns="18288" bIns="18288" anchor="ctr">
+          <a:bodyPr wrap="none" lIns="18288" rIns="18288" tIns="18288" bIns="18288" anchor="t">
             <a:spAutoFit/>
           </a:bodyPr>
           <a:lstStyle/>
@@ -3345,51 +5889,307 @@
               </a:spcAft>
             </a:pPr>
             <a:r>
-              <a:rPr sz="1400" b="0" i="0">
+              <a:rPr sz="1200" b="0" i="0">
+                <a:solidFill>
+                  <a:srgbClr val="F2B880"/>
+                </a:solidFill>
+                <a:latin typeface="Arial"/>
+              </a:rPr>
+              <a:t>uniform jet: on the boundary</a:t>
+            </a:r>
+          </a:p>
+        </p:txBody>
+      </p:sp>
+      <p:sp>
+        <p:nvSpPr>
+          <p:cNvPr id="36" name="C3-E18 ellipse 34" descr="sci-ppt:o034"/>
+          <p:cNvSpPr/>
+          <p:nvPr/>
+        </p:nvSpPr>
+        <p:spPr>
+          <a:xfrm>
+            <a:off x="3174982" y="3736848"/>
+            <a:ext cx="146304" cy="146304"/>
+          </a:xfrm>
+          <a:prstGeom prst="ellipse">
+            <a:avLst/>
+          </a:prstGeom>
+          <a:solidFill>
+            <a:srgbClr val="F28BA0"/>
+          </a:solidFill>
+          <a:ln w="12700">
+            <a:solidFill>
+              <a:srgbClr val="F28BA0"/>
+            </a:solidFill>
+          </a:ln>
+          <a:effectLst/>
+        </p:spPr>
+        <p:txBody>
+          <a:bodyPr rtlCol="0" anchor="ctr"/>
+          <a:lstStyle/>
+          <a:p>
+            <a:pPr algn="ctr"/>
+          </a:p>
+        </p:txBody>
+      </p:sp>
+      <p:sp>
+        <p:nvSpPr>
+          <p:cNvPr id="37" name="C3-E18 text 35" descr="sci-ppt:o035"/>
+          <p:cNvSpPr txBox="1"/>
+          <p:nvPr/>
+        </p:nvSpPr>
+        <p:spPr>
+          <a:xfrm>
+            <a:off x="1099294" y="3307080"/>
+            <a:ext cx="2011680" cy="402081"/>
+          </a:xfrm>
+          <a:prstGeom prst="rect">
+            <a:avLst/>
+          </a:prstGeom>
+          <a:noFill/>
+          <a:effectLst/>
+        </p:spPr>
+        <p:txBody>
+          <a:bodyPr wrap="none" lIns="18288" rIns="18288" tIns="18288" bIns="18288" anchor="t">
+            <a:spAutoFit/>
+          </a:bodyPr>
+          <a:lstStyle/>
+          <a:p>
+            <a:pPr algn="l">
+              <a:spcAft>
+                <a:spcPts val="0"/>
+              </a:spcAft>
+            </a:pPr>
+            <a:r>
+              <a:rPr sz="1150" b="0" i="0">
+                <a:solidFill>
+                  <a:srgbClr val="F28BA0"/>
+                </a:solidFill>
+                <a:latin typeface="Arial"/>
+              </a:rPr>
+              <a:t>spread of velocities:</a:t>
+            </a:r>
+          </a:p>
+          <a:p>
+            <a:pPr algn="l">
+              <a:spcAft>
+                <a:spcPts val="0"/>
+              </a:spcAft>
+            </a:pPr>
+            <a:r>
+              <a:rPr sz="1150" b="0" i="0">
+                <a:solidFill>
+                  <a:srgbClr val="F28BA0"/>
+                </a:solidFill>
+                <a:latin typeface="Arial"/>
+              </a:rPr>
+              <a:t>same E, less P</a:t>
+            </a:r>
+          </a:p>
+        </p:txBody>
+      </p:sp>
+      <p:sp>
+        <p:nvSpPr>
+          <p:cNvPr id="38" name="C3-E18 text 36" descr="sci-ppt:o036"/>
+          <p:cNvSpPr txBox="1"/>
+          <p:nvPr/>
+        </p:nvSpPr>
+        <p:spPr>
+          <a:xfrm>
+            <a:off x="1572768" y="1645919"/>
+            <a:ext cx="2194560" cy="239395"/>
+          </a:xfrm>
+          <a:prstGeom prst="rect">
+            <a:avLst/>
+          </a:prstGeom>
+          <a:noFill/>
+          <a:effectLst/>
+        </p:spPr>
+        <p:txBody>
+          <a:bodyPr wrap="none" lIns="18288" rIns="18288" tIns="18288" bIns="18288" anchor="t">
+            <a:spAutoFit/>
+          </a:bodyPr>
+          <a:lstStyle/>
+          <a:p>
+            <a:pPr algn="l">
+              <a:spcAft>
+                <a:spcPts val="0"/>
+              </a:spcAft>
+            </a:pPr>
+            <a:r>
+              <a:rPr sz="1250" b="0" i="0">
+                <a:solidFill>
+                  <a:srgbClr val="8EDBD4"/>
+                </a:solidFill>
+                <a:latin typeface="Arial"/>
+              </a:rPr>
+              <a:t>allowed: E ≥ P²/2m</a:t>
+            </a:r>
+          </a:p>
+        </p:txBody>
+      </p:sp>
+      <p:sp>
+        <p:nvSpPr>
+          <p:cNvPr id="39" name="C3-E18 text 37" descr="sci-ppt:o037"/>
+          <p:cNvSpPr txBox="1"/>
+          <p:nvPr/>
+        </p:nvSpPr>
+        <p:spPr>
+          <a:xfrm>
+            <a:off x="4711653" y="4632960"/>
+            <a:ext cx="1097280" cy="231648"/>
+          </a:xfrm>
+          <a:prstGeom prst="rect">
+            <a:avLst/>
+          </a:prstGeom>
+          <a:noFill/>
+          <a:effectLst/>
+        </p:spPr>
+        <p:txBody>
+          <a:bodyPr wrap="none" lIns="18288" rIns="18288" tIns="18288" bIns="18288" anchor="t">
+            <a:spAutoFit/>
+          </a:bodyPr>
+          <a:lstStyle/>
+          <a:p>
+            <a:pPr algn="l">
+              <a:spcAft>
+                <a:spcPts val="0"/>
+              </a:spcAft>
+            </a:pPr>
+            <a:r>
+              <a:rPr sz="1200" b="0" i="0">
+                <a:solidFill>
+                  <a:srgbClr val="B4C7D2"/>
+                </a:solidFill>
+                <a:latin typeface="Arial"/>
+              </a:rPr>
+              <a:t>forbidden</a:t>
+            </a:r>
+          </a:p>
+        </p:txBody>
+      </p:sp>
+      <p:sp>
+        <p:nvSpPr>
+          <p:cNvPr id="40" name="C3-E18 round_rect 38" descr="sci-ppt:o038"/>
+          <p:cNvSpPr/>
+          <p:nvPr/>
+        </p:nvSpPr>
+        <p:spPr>
+          <a:xfrm>
+            <a:off x="7040880" y="1371600"/>
+            <a:ext cx="4800600" cy="3657600"/>
+          </a:xfrm>
+          <a:prstGeom prst="roundRect">
+            <a:avLst/>
+          </a:prstGeom>
+          <a:solidFill>
+            <a:srgbClr val="213E4B"/>
+          </a:solidFill>
+          <a:ln w="20320">
+            <a:solidFill>
+              <a:srgbClr val="8EDBD4"/>
+            </a:solidFill>
+          </a:ln>
+          <a:effectLst/>
+        </p:spPr>
+        <p:txBody>
+          <a:bodyPr rtlCol="0" anchor="ctr"/>
+          <a:lstStyle/>
+          <a:p>
+            <a:pPr algn="ctr"/>
+          </a:p>
+        </p:txBody>
+      </p:sp>
+      <p:sp>
+        <p:nvSpPr>
+          <p:cNvPr id="41" name="C3-E18 text 39" descr="sci-ppt:o039"/>
+          <p:cNvSpPr txBox="1"/>
+          <p:nvPr/>
+        </p:nvSpPr>
+        <p:spPr>
+          <a:xfrm>
+            <a:off x="7150608" y="1426464"/>
+            <a:ext cx="4581144" cy="247142"/>
+          </a:xfrm>
+          <a:prstGeom prst="rect">
+            <a:avLst/>
+          </a:prstGeom>
+          <a:noFill/>
+          <a:effectLst/>
+        </p:spPr>
+        <p:txBody>
+          <a:bodyPr wrap="none" lIns="18288" rIns="18288" tIns="18288" bIns="18288" anchor="t">
+            <a:spAutoFit/>
+          </a:bodyPr>
+          <a:lstStyle/>
+          <a:p>
+            <a:pPr algn="l">
+              <a:spcAft>
+                <a:spcPts val="0"/>
+              </a:spcAft>
+            </a:pPr>
+            <a:r>
+              <a:rPr sz="1300" b="1" i="0">
+                <a:solidFill>
+                  <a:srgbClr val="8EDBD4"/>
+                </a:solidFill>
+                <a:latin typeface="Arial"/>
+              </a:rPr>
+              <a:t>Cauchy–Schwarz on the jet liquid</a:t>
+            </a:r>
+          </a:p>
+        </p:txBody>
+      </p:sp>
+      <p:sp>
+        <p:nvSpPr>
+          <p:cNvPr id="42" name="C3-E18 text 40" descr="sci-ppt:o040"/>
+          <p:cNvSpPr txBox="1"/>
+          <p:nvPr/>
+        </p:nvSpPr>
+        <p:spPr>
+          <a:xfrm>
+            <a:off x="7178040" y="1828800"/>
+            <a:ext cx="4572000" cy="239395"/>
+          </a:xfrm>
+          <a:prstGeom prst="rect">
+            <a:avLst/>
+          </a:prstGeom>
+          <a:noFill/>
+          <a:effectLst/>
+        </p:spPr>
+        <p:txBody>
+          <a:bodyPr wrap="none" lIns="18288" rIns="18288" tIns="18288" bIns="18288" anchor="t">
+            <a:spAutoFit/>
+          </a:bodyPr>
+          <a:lstStyle/>
+          <a:p>
+            <a:pPr algn="l">
+              <a:spcAft>
+                <a:spcPts val="0"/>
+              </a:spcAft>
+            </a:pPr>
+            <a:r>
+              <a:rPr sz="1250" b="1" i="0">
                 <a:solidFill>
                   <a:srgbClr val="E7F0F3"/>
                 </a:solidFill>
                 <a:latin typeface="Arial"/>
               </a:rPr>
-              <a:t>d_j = 2a_j</a:t>
-            </a:r>
-          </a:p>
-        </p:txBody>
-      </p:sp>
-      <p:cxnSp>
-        <p:nvCxnSpPr>
-          <p:cNvPr id="10" name="C3-E18 arrow 8" descr="sci-ppt:o008"/>
-          <p:cNvCxnSpPr/>
-          <p:nvPr/>
-        </p:nvCxnSpPr>
-        <p:spPr>
-          <a:xfrm>
-            <a:off x="6126480" y="1874519"/>
-            <a:ext cx="4663440" cy="0"/>
-          </a:xfrm>
-          <a:prstGeom prst="line">
-            <a:avLst/>
-          </a:prstGeom>
-          <a:ln w="25400">
-            <a:solidFill>
-              <a:srgbClr val="8EDBD4"/>
-            </a:solidFill>
-            <a:headEnd type="none" w="med" len="med"/>
-            <a:tailEnd type="triangle" w="med" len="med"/>
-          </a:ln>
-          <a:effectLst/>
-        </p:spPr>
-      </p:cxnSp>
-      <p:sp>
-        <p:nvSpPr>
-          <p:cNvPr id="11" name="C3-E18 text 9" descr="sci-ppt:o009"/>
+              <a:t>Aⱼ = πdⱼ²/4,  mⱼ = ρA_jLⱼ</a:t>
+            </a:r>
+          </a:p>
+        </p:txBody>
+      </p:sp>
+      <p:sp>
+        <p:nvSpPr>
+          <p:cNvPr id="43" name="C3-E18 text 41" descr="sci-ppt:o041"/>
           <p:cNvSpPr txBox="1"/>
           <p:nvPr/>
         </p:nvSpPr>
         <p:spPr>
           <a:xfrm>
-            <a:off x="6400800" y="1188720"/>
-            <a:ext cx="4572000" cy="731520"/>
+            <a:off x="7178040" y="2286000"/>
+            <a:ext cx="4572000" cy="231648"/>
           </a:xfrm>
           <a:prstGeom prst="rect">
             <a:avLst/>
@@ -3398,7 +6198,7 @@
           <a:effectLst/>
         </p:spPr>
         <p:txBody>
-          <a:bodyPr wrap="square" lIns="27432" rIns="27432" tIns="18288" bIns="18288" anchor="ctr">
+          <a:bodyPr wrap="none" lIns="18288" rIns="18288" tIns="18288" bIns="18288" anchor="t">
             <a:spAutoFit/>
           </a:bodyPr>
           <a:lstStyle/>
@@ -3409,15 +6209,79 @@
               </a:spcAft>
             </a:pPr>
             <a:r>
-              <a:rPr sz="2000" b="0" i="0">
+              <a:rPr sz="1200" b="1" i="0">
+                <a:solidFill>
+                  <a:srgbClr val="F2B880"/>
+                </a:solidFill>
+                <a:latin typeface="Arial"/>
+              </a:rPr>
+              <a:t>mⱼ = 1000 × π(10 µm)²/4 × 50 µm = 3.927 ng</a:t>
+            </a:r>
+          </a:p>
+        </p:txBody>
+      </p:sp>
+      <p:sp>
+        <p:nvSpPr>
+          <p:cNvPr id="44" name="C3-E18 text 42" descr="sci-ppt:o042"/>
+          <p:cNvSpPr txBox="1"/>
+          <p:nvPr/>
+        </p:nvSpPr>
+        <p:spPr>
+          <a:xfrm>
+            <a:off x="7178040" y="2834640"/>
+            <a:ext cx="4572000" cy="239395"/>
+          </a:xfrm>
+          <a:prstGeom prst="rect">
+            <a:avLst/>
+          </a:prstGeom>
+          <a:noFill/>
+          <a:effectLst/>
+        </p:spPr>
+        <p:txBody>
+          <a:bodyPr wrap="none" lIns="18288" rIns="18288" tIns="18288" bIns="18288" anchor="t">
+            <a:spAutoFit/>
+          </a:bodyPr>
+          <a:lstStyle/>
+          <a:p>
+            <a:pPr algn="l">
+              <a:spcAft>
+                <a:spcPts val="0"/>
+              </a:spcAft>
+            </a:pPr>
+            <a:r>
+              <a:rPr sz="1250" b="1" i="0">
                 <a:solidFill>
                   <a:srgbClr val="E7F0F3"/>
                 </a:solidFill>
                 <a:latin typeface="Arial"/>
               </a:rPr>
-              <a:t>Finite mass defines speed</a:t>
-            </a:r>
-          </a:p>
+              <a:t>|Pⱼ|² ≤ (∫dm)(∫u_z² dm) ≤ 2 mⱼ Eⱼ</a:t>
+            </a:r>
+          </a:p>
+        </p:txBody>
+      </p:sp>
+      <p:sp>
+        <p:nvSpPr>
+          <p:cNvPr id="45" name="C3-E18 text 43" descr="sci-ppt:o043"/>
+          <p:cNvSpPr txBox="1"/>
+          <p:nvPr/>
+        </p:nvSpPr>
+        <p:spPr>
+          <a:xfrm>
+            <a:off x="7178040" y="3383280"/>
+            <a:ext cx="4572000" cy="239395"/>
+          </a:xfrm>
+          <a:prstGeom prst="rect">
+            <a:avLst/>
+          </a:prstGeom>
+          <a:noFill/>
+          <a:effectLst/>
+        </p:spPr>
+        <p:txBody>
+          <a:bodyPr wrap="none" lIns="18288" rIns="18288" tIns="18288" bIns="18288" anchor="t">
+            <a:spAutoFit/>
+          </a:bodyPr>
+          <a:lstStyle/>
           <a:p>
             <a:pPr algn="l">
               <a:spcAft>
@@ -3425,27 +6289,123 @@
               </a:spcAft>
             </a:pPr>
             <a:r>
-              <a:rPr sz="2000" b="0" i="0">
+              <a:rPr sz="1250" b="1" i="0">
+                <a:solidFill>
+                  <a:srgbClr val="8EDBD4"/>
+                </a:solidFill>
+                <a:latin typeface="Arial"/>
+              </a:rPr>
+              <a:t>Uᵣₘₛ ≤ √(2Eₐᵥₐᵢₗ / mⱼ)</a:t>
+            </a:r>
+          </a:p>
+        </p:txBody>
+      </p:sp>
+      <p:sp>
+        <p:nvSpPr>
+          <p:cNvPr id="46" name="C3-E18 text 44" descr="sci-ppt:o044"/>
+          <p:cNvSpPr txBox="1"/>
+          <p:nvPr/>
+        </p:nvSpPr>
+        <p:spPr>
+          <a:xfrm>
+            <a:off x="7178040" y="3931920"/>
+            <a:ext cx="4572000" cy="417576"/>
+          </a:xfrm>
+          <a:prstGeom prst="rect">
+            <a:avLst/>
+          </a:prstGeom>
+          <a:noFill/>
+          <a:effectLst/>
+        </p:spPr>
+        <p:txBody>
+          <a:bodyPr wrap="none" lIns="18288" rIns="18288" tIns="18288" bIns="18288" anchor="t">
+            <a:spAutoFit/>
+          </a:bodyPr>
+          <a:lstStyle/>
+          <a:p>
+            <a:pPr algn="l">
+              <a:spcAft>
+                <a:spcPts val="0"/>
+              </a:spcAft>
+            </a:pPr>
+            <a:r>
+              <a:rPr sz="1200" b="0" i="0">
+                <a:solidFill>
+                  <a:srgbClr val="B4C7D2"/>
+                </a:solidFill>
+                <a:latin typeface="Arial"/>
+              </a:rPr>
+              <a:t>Finite mass turns an energy budget into a bound on both</a:t>
+            </a:r>
+          </a:p>
+          <a:p>
+            <a:pPr algn="l">
+              <a:spcAft>
+                <a:spcPts val="0"/>
+              </a:spcAft>
+            </a:pPr>
+            <a:r>
+              <a:rPr sz="1200" b="0" i="0">
+                <a:solidFill>
+                  <a:srgbClr val="B4C7D2"/>
+                </a:solidFill>
+                <a:latin typeface="Arial"/>
+              </a:rPr>
+              <a:t>speed and momentum.</a:t>
+            </a:r>
+          </a:p>
+        </p:txBody>
+      </p:sp>
+      <p:sp>
+        <p:nvSpPr>
+          <p:cNvPr id="47" name="C3-E18 text 45" descr="sci-ppt:o045"/>
+          <p:cNvSpPr txBox="1"/>
+          <p:nvPr/>
+        </p:nvSpPr>
+        <p:spPr>
+          <a:xfrm>
+            <a:off x="914400" y="5733288"/>
+            <a:ext cx="10972800" cy="239395"/>
+          </a:xfrm>
+          <a:prstGeom prst="rect">
+            <a:avLst/>
+          </a:prstGeom>
+          <a:noFill/>
+          <a:effectLst/>
+        </p:spPr>
+        <p:txBody>
+          <a:bodyPr wrap="none" lIns="18288" rIns="18288" tIns="18288" bIns="18288" anchor="t">
+            <a:spAutoFit/>
+          </a:bodyPr>
+          <a:lstStyle/>
+          <a:p>
+            <a:pPr algn="l">
+              <a:spcAft>
+                <a:spcPts val="0"/>
+              </a:spcAft>
+            </a:pPr>
+            <a:r>
+              <a:rPr sz="1250" b="0" i="0">
                 <a:solidFill>
                   <a:srgbClr val="E7F0F3"/>
                 </a:solidFill>
                 <a:latin typeface="Arial"/>
               </a:rPr>
-              <a:t>and useful momentum.</a:t>
-            </a:r>
-          </a:p>
-        </p:txBody>
-      </p:sp>
-      <p:sp>
-        <p:nvSpPr>
-          <p:cNvPr id="12" name="C3-E18 text 10" descr="sci-ppt:o010"/>
+              <a:t>The jet carries at most P = √(2 m E) of useful momentum; a non-uniform velocity spends energy without adding momentum.</a:t>
+            </a:r>
+          </a:p>
+        </p:txBody>
+      </p:sp>
+      <p:sp>
+        <p:nvSpPr>
+          <p:cNvPr id="48" name="C3-E18 text 46" descr="sci-ppt:o046"/>
           <p:cNvSpPr txBox="1"/>
           <p:nvPr/>
         </p:nvSpPr>
         <p:spPr>
           <a:xfrm>
-            <a:off x="6400800" y="2377440"/>
-            <a:ext cx="4572000" cy="731520"/>
+            <a:off x="320040" y="6510528"/>
+            <a:ext cx="11521440" cy="200660"/>
           </a:xfrm>
           <a:prstGeom prst="rect">
             <a:avLst/>
@@ -3454,445 +6414,7 @@
           <a:effectLst/>
         </p:spPr>
         <p:txBody>
-          <a:bodyPr wrap="square" lIns="27432" rIns="27432" tIns="18288" bIns="18288" anchor="ctr">
-            <a:spAutoFit/>
-          </a:bodyPr>
-          <a:lstStyle/>
-          <a:p>
-            <a:pPr algn="l">
-              <a:spcAft>
-                <a:spcPts val="0"/>
-              </a:spcAft>
-            </a:pPr>
-            <a:r>
-              <a:rPr sz="2000" b="0" i="0">
-                <a:solidFill>
-                  <a:srgbClr val="8EDBD4"/>
-                </a:solidFill>
-                <a:latin typeface="Arial"/>
-              </a:rPr>
-              <a:t>P_j² ≤ 2 m_j E_j</a:t>
-            </a:r>
-          </a:p>
-          <a:p>
-            <a:pPr algn="l">
-              <a:spcAft>
-                <a:spcPts val="0"/>
-              </a:spcAft>
-            </a:pPr>
-            <a:r>
-              <a:rPr sz="2000" b="0" i="0">
-                <a:solidFill>
-                  <a:srgbClr val="8EDBD4"/>
-                </a:solidFill>
-                <a:latin typeface="Arial"/>
-              </a:rPr>
-              <a:t>E_j ≤ E_avail</a:t>
-            </a:r>
-          </a:p>
-        </p:txBody>
-      </p:sp>
-      <p:cxnSp>
-        <p:nvCxnSpPr>
-          <p:cNvPr id="13" name="C3-E18 line 11" descr="sci-ppt:o011"/>
-          <p:cNvCxnSpPr/>
-          <p:nvPr/>
-        </p:nvCxnSpPr>
-        <p:spPr>
-          <a:xfrm>
-            <a:off x="274320" y="3977639"/>
-            <a:ext cx="11612880" cy="0"/>
-          </a:xfrm>
-          <a:prstGeom prst="line">
-            <a:avLst/>
-          </a:prstGeom>
-          <a:ln w="12700">
-            <a:solidFill>
-              <a:srgbClr val="405967"/>
-            </a:solidFill>
-          </a:ln>
-          <a:effectLst/>
-        </p:spPr>
-      </p:cxnSp>
-      <p:sp>
-        <p:nvSpPr>
-          <p:cNvPr id="14" name="C3-E18 text 12" descr="sci-ppt:o012"/>
-          <p:cNvSpPr txBox="1"/>
-          <p:nvPr/>
-        </p:nvSpPr>
-        <p:spPr>
-          <a:xfrm>
-            <a:off x="320040" y="4096512"/>
-            <a:ext cx="5715000" cy="246888"/>
-          </a:xfrm>
-          <a:prstGeom prst="rect">
-            <a:avLst/>
-          </a:prstGeom>
-          <a:noFill/>
-          <a:effectLst/>
-        </p:spPr>
-        <p:txBody>
-          <a:bodyPr wrap="square" lIns="27432" rIns="27432" tIns="18288" bIns="18288" anchor="ctr">
-            <a:spAutoFit/>
-          </a:bodyPr>
-          <a:lstStyle/>
-          <a:p>
-            <a:pPr algn="l">
-              <a:spcAft>
-                <a:spcPts val="0"/>
-              </a:spcAft>
-            </a:pPr>
-            <a:r>
-              <a:rPr sz="1150" b="0" i="0">
-                <a:solidFill>
-                  <a:srgbClr val="B4C7D2"/>
-                </a:solidFill>
-                <a:latin typeface="Arial"/>
-              </a:rPr>
-              <a:t>• d_j, A_j cross section</a:t>
-            </a:r>
-          </a:p>
-        </p:txBody>
-      </p:sp>
-      <p:sp>
-        <p:nvSpPr>
-          <p:cNvPr id="15" name="C3-E18 text 13" descr="sci-ppt:o013"/>
-          <p:cNvSpPr txBox="1"/>
-          <p:nvPr/>
-        </p:nvSpPr>
-        <p:spPr>
-          <a:xfrm>
-            <a:off x="6217920" y="4096512"/>
-            <a:ext cx="5715000" cy="246888"/>
-          </a:xfrm>
-          <a:prstGeom prst="rect">
-            <a:avLst/>
-          </a:prstGeom>
-          <a:noFill/>
-          <a:effectLst/>
-        </p:spPr>
-        <p:txBody>
-          <a:bodyPr wrap="square" lIns="27432" rIns="27432" tIns="18288" bIns="18288" anchor="ctr">
-            <a:spAutoFit/>
-          </a:bodyPr>
-          <a:lstStyle/>
-          <a:p>
-            <a:pPr algn="l">
-              <a:spcAft>
-                <a:spcPts val="0"/>
-              </a:spcAft>
-            </a:pPr>
-            <a:r>
-              <a:rPr sz="1150" b="0" i="0">
-                <a:solidFill>
-                  <a:srgbClr val="B4C7D2"/>
-                </a:solidFill>
-                <a:latin typeface="Arial"/>
-              </a:rPr>
-              <a:t>• L_j emitted length</a:t>
-            </a:r>
-          </a:p>
-        </p:txBody>
-      </p:sp>
-      <p:sp>
-        <p:nvSpPr>
-          <p:cNvPr id="16" name="C3-E18 text 14" descr="sci-ppt:o014"/>
-          <p:cNvSpPr txBox="1"/>
-          <p:nvPr/>
-        </p:nvSpPr>
-        <p:spPr>
-          <a:xfrm>
-            <a:off x="320040" y="4329684"/>
-            <a:ext cx="5715000" cy="246888"/>
-          </a:xfrm>
-          <a:prstGeom prst="rect">
-            <a:avLst/>
-          </a:prstGeom>
-          <a:noFill/>
-          <a:effectLst/>
-        </p:spPr>
-        <p:txBody>
-          <a:bodyPr wrap="square" lIns="27432" rIns="27432" tIns="18288" bIns="18288" anchor="ctr">
-            <a:spAutoFit/>
-          </a:bodyPr>
-          <a:lstStyle/>
-          <a:p>
-            <a:pPr algn="l">
-              <a:spcAft>
-                <a:spcPts val="0"/>
-              </a:spcAft>
-            </a:pPr>
-            <a:r>
-              <a:rPr sz="1150" b="0" i="0">
-                <a:solidFill>
-                  <a:srgbClr val="B4C7D2"/>
-                </a:solidFill>
-                <a:latin typeface="Arial"/>
-              </a:rPr>
-              <a:t>• M_j emitted liquid; m_j = ∫dm</a:t>
-            </a:r>
-          </a:p>
-        </p:txBody>
-      </p:sp>
-      <p:sp>
-        <p:nvSpPr>
-          <p:cNvPr id="17" name="C3-E18 text 15" descr="sci-ppt:o015"/>
-          <p:cNvSpPr txBox="1"/>
-          <p:nvPr/>
-        </p:nvSpPr>
-        <p:spPr>
-          <a:xfrm>
-            <a:off x="6217920" y="4329684"/>
-            <a:ext cx="5715000" cy="246888"/>
-          </a:xfrm>
-          <a:prstGeom prst="rect">
-            <a:avLst/>
-          </a:prstGeom>
-          <a:noFill/>
-          <a:effectLst/>
-        </p:spPr>
-        <p:txBody>
-          <a:bodyPr wrap="square" lIns="27432" rIns="27432" tIns="18288" bIns="18288" anchor="ctr">
-            <a:spAutoFit/>
-          </a:bodyPr>
-          <a:lstStyle/>
-          <a:p>
-            <a:pPr algn="l">
-              <a:spcAft>
-                <a:spcPts val="0"/>
-              </a:spcAft>
-            </a:pPr>
-            <a:r>
-              <a:rPr sz="1150" b="0" i="0">
-                <a:solidFill>
-                  <a:srgbClr val="B4C7D2"/>
-                </a:solidFill>
-                <a:latin typeface="Arial"/>
-              </a:rPr>
-              <a:t>• u field; e_z transfer direction</a:t>
-            </a:r>
-          </a:p>
-        </p:txBody>
-      </p:sp>
-      <p:sp>
-        <p:nvSpPr>
-          <p:cNvPr id="18" name="C3-E18 text 16" descr="sci-ppt:o016"/>
-          <p:cNvSpPr txBox="1"/>
-          <p:nvPr/>
-        </p:nvSpPr>
-        <p:spPr>
-          <a:xfrm>
-            <a:off x="320040" y="4562856"/>
-            <a:ext cx="5715000" cy="246888"/>
-          </a:xfrm>
-          <a:prstGeom prst="rect">
-            <a:avLst/>
-          </a:prstGeom>
-          <a:noFill/>
-          <a:effectLst/>
-        </p:spPr>
-        <p:txBody>
-          <a:bodyPr wrap="square" lIns="27432" rIns="27432" tIns="18288" bIns="18288" anchor="ctr">
-            <a:spAutoFit/>
-          </a:bodyPr>
-          <a:lstStyle/>
-          <a:p>
-            <a:pPr algn="l">
-              <a:spcAft>
-                <a:spcPts val="0"/>
-              </a:spcAft>
-            </a:pPr>
-            <a:r>
-              <a:rPr sz="1150" b="0" i="0">
-                <a:solidFill>
-                  <a:srgbClr val="B4C7D2"/>
-                </a:solidFill>
-                <a:latin typeface="Arial"/>
-              </a:rPr>
-              <a:t>• P_j directional momentum</a:t>
-            </a:r>
-          </a:p>
-        </p:txBody>
-      </p:sp>
-      <p:sp>
-        <p:nvSpPr>
-          <p:cNvPr id="19" name="C3-E18 text 17" descr="sci-ppt:o017"/>
-          <p:cNvSpPr txBox="1"/>
-          <p:nvPr/>
-        </p:nvSpPr>
-        <p:spPr>
-          <a:xfrm>
-            <a:off x="6217920" y="4562856"/>
-            <a:ext cx="5715000" cy="246888"/>
-          </a:xfrm>
-          <a:prstGeom prst="rect">
-            <a:avLst/>
-          </a:prstGeom>
-          <a:noFill/>
-          <a:effectLst/>
-        </p:spPr>
-        <p:txBody>
-          <a:bodyPr wrap="square" lIns="27432" rIns="27432" tIns="18288" bIns="18288" anchor="ctr">
-            <a:spAutoFit/>
-          </a:bodyPr>
-          <a:lstStyle/>
-          <a:p>
-            <a:pPr algn="l">
-              <a:spcAft>
-                <a:spcPts val="0"/>
-              </a:spcAft>
-            </a:pPr>
-            <a:r>
-              <a:rPr sz="1150" b="0" i="0">
-                <a:solidFill>
-                  <a:srgbClr val="B4C7D2"/>
-                </a:solidFill>
-                <a:latin typeface="Arial"/>
-              </a:rPr>
-              <a:t>• E_j, E_avail energy budget</a:t>
-            </a:r>
-          </a:p>
-        </p:txBody>
-      </p:sp>
-      <p:sp>
-        <p:nvSpPr>
-          <p:cNvPr id="20" name="C3-E18 text 18" descr="sci-ppt:o018"/>
-          <p:cNvSpPr txBox="1"/>
-          <p:nvPr/>
-        </p:nvSpPr>
-        <p:spPr>
-          <a:xfrm>
-            <a:off x="320040" y="4796028"/>
-            <a:ext cx="5715000" cy="246888"/>
-          </a:xfrm>
-          <a:prstGeom prst="rect">
-            <a:avLst/>
-          </a:prstGeom>
-          <a:noFill/>
-          <a:effectLst/>
-        </p:spPr>
-        <p:txBody>
-          <a:bodyPr wrap="square" lIns="27432" rIns="27432" tIns="18288" bIns="18288" anchor="ctr">
-            <a:spAutoFit/>
-          </a:bodyPr>
-          <a:lstStyle/>
-          <a:p>
-            <a:pPr algn="l">
-              <a:spcAft>
-                <a:spcPts val="0"/>
-              </a:spcAft>
-            </a:pPr>
-            <a:r>
-              <a:rPr sz="1150" b="0" i="0">
-                <a:solidFill>
-                  <a:srgbClr val="B4C7D2"/>
-                </a:solidFill>
-                <a:latin typeface="Arial"/>
-              </a:rPr>
-              <a:t>• U_rms finite-mass speed; ρ, π</a:t>
-            </a:r>
-          </a:p>
-        </p:txBody>
-      </p:sp>
-      <p:sp>
-        <p:nvSpPr>
-          <p:cNvPr id="21" name="C3-E18 text 19" descr="sci-ppt:o019"/>
-          <p:cNvSpPr txBox="1"/>
-          <p:nvPr/>
-        </p:nvSpPr>
-        <p:spPr>
-          <a:xfrm>
-            <a:off x="320040" y="5596128"/>
-            <a:ext cx="11430000" cy="292608"/>
-          </a:xfrm>
-          <a:prstGeom prst="rect">
-            <a:avLst/>
-          </a:prstGeom>
-          <a:noFill/>
-          <a:effectLst/>
-        </p:spPr>
-        <p:txBody>
-          <a:bodyPr wrap="square" lIns="27432" rIns="27432" tIns="18288" bIns="18288" anchor="ctr">
-            <a:spAutoFit/>
-          </a:bodyPr>
-          <a:lstStyle/>
-          <a:p>
-            <a:pPr algn="l">
-              <a:spcAft>
-                <a:spcPts val="0"/>
-              </a:spcAft>
-            </a:pPr>
-            <a:r>
-              <a:rPr sz="1150" b="0" i="0">
-                <a:solidFill>
-                  <a:srgbClr val="8EDBD4"/>
-                </a:solidFill>
-                <a:latin typeface="Arial"/>
-              </a:rPr>
-              <a:t>Uniform aligned velocity is required for momentum equality</a:t>
-            </a:r>
-          </a:p>
-        </p:txBody>
-      </p:sp>
-      <p:sp>
-        <p:nvSpPr>
-          <p:cNvPr id="22" name="C3-E18 text 20" descr="sci-ppt:o020"/>
-          <p:cNvSpPr txBox="1"/>
-          <p:nvPr/>
-        </p:nvSpPr>
-        <p:spPr>
-          <a:xfrm>
-            <a:off x="320040" y="5870448"/>
-            <a:ext cx="11430000" cy="292608"/>
-          </a:xfrm>
-          <a:prstGeom prst="rect">
-            <a:avLst/>
-          </a:prstGeom>
-          <a:noFill/>
-          <a:effectLst/>
-        </p:spPr>
-        <p:txBody>
-          <a:bodyPr wrap="square" lIns="27432" rIns="27432" tIns="18288" bIns="18288" anchor="ctr">
-            <a:spAutoFit/>
-          </a:bodyPr>
-          <a:lstStyle/>
-          <a:p>
-            <a:pPr algn="l">
-              <a:spcAft>
-                <a:spcPts val="0"/>
-              </a:spcAft>
-            </a:pPr>
-            <a:r>
-              <a:rPr sz="1150" b="0" i="0">
-                <a:solidFill>
-                  <a:srgbClr val="8EDBD4"/>
-                </a:solidFill>
-                <a:latin typeface="Arial"/>
-              </a:rPr>
-              <a:t>A mathematical tip can have negligible mass</a:t>
-            </a:r>
-          </a:p>
-        </p:txBody>
-      </p:sp>
-      <p:sp>
-        <p:nvSpPr>
-          <p:cNvPr id="23" name="C3-E18 text 21" descr="sci-ppt:o021"/>
-          <p:cNvSpPr txBox="1"/>
-          <p:nvPr/>
-        </p:nvSpPr>
-        <p:spPr>
-          <a:xfrm>
-            <a:off x="320040" y="6473952"/>
-            <a:ext cx="11430000" cy="256032"/>
-          </a:xfrm>
-          <a:prstGeom prst="rect">
-            <a:avLst/>
-          </a:prstGeom>
-          <a:noFill/>
-          <a:effectLst/>
-        </p:spPr>
-        <p:txBody>
-          <a:bodyPr wrap="square" lIns="27432" rIns="27432" tIns="18288" bIns="18288" anchor="ctr">
+          <a:bodyPr wrap="none" lIns="18288" rIns="18288" tIns="18288" bIns="18288" anchor="t">
             <a:spAutoFit/>
           </a:bodyPr>
           <a:lstStyle/>
@@ -3909,7 +6431,7 @@
                 </a:solidFill>
                 <a:latin typeface="Arial"/>
               </a:rPr>
-              <a:t>Model schematic; geometry is not to scale.</a:t>
+              <a:t>Finite-mass definitions and bound of Eq. C3-E18.</a:t>
             </a:r>
           </a:p>
         </p:txBody>
